--- a/docs/architecture_slides.pptx
+++ b/docs/architecture_slides.pptx
@@ -20,6 +20,9 @@
     <p:sldId id="268" r:id="rId19"/>
     <p:sldId id="269" r:id="rId20"/>
     <p:sldId id="270" r:id="rId21"/>
+    <p:sldId id="271" r:id="rId22"/>
+    <p:sldId id="272" r:id="rId23"/>
+    <p:sldId id="273" r:id="rId24"/>
   </p:sldIdLst>
   <p:sldSz cx="12191695" cy="6858000" type="screen4x3"/>
   <p:notesSz cx="6858000" cy="9144000"/>
@@ -3275,7 +3278,7 @@
                 </a:solidFill>
                 <a:latin typeface="Helvetica"/>
               </a:rPr>
-              <a:t>MCP Tool Surface</a:t>
+              <a:t>Workflow.wait_for_cascade</a:t>
             </a:r>
           </a:p>
           <a:p>
@@ -3286,14 +3289,14 @@
                 </a:solidFill>
                 <a:latin typeface="Helvetica"/>
               </a:rPr>
-              <a:t>23 tools across 8 groups</a:t>
+              <a:t>Added to nanobrain 2026-05-05 — drains the trigger executor's task set with a settle window</a:t>
             </a:r>
           </a:p>
         </p:txBody>
       </p:sp>
       <p:pic>
         <p:nvPicPr>
-          <p:cNvPr id="3" name="Picture 2" descr="07_mcp_tool_distribution.png"/>
+          <p:cNvPr id="3" name="Picture 2" descr="08_trigger_cascade_timeline.png"/>
           <p:cNvPicPr>
             <a:picLocks noChangeAspect="1"/>
           </p:cNvPicPr>
@@ -3307,8 +3310,8 @@
         </p:blipFill>
         <p:spPr>
           <a:xfrm>
-            <a:off x="640080" y="914400"/>
-            <a:ext cx="10881360" cy="6288462"/>
+            <a:off x="365760" y="914400"/>
+            <a:ext cx="11521440" cy="7994926"/>
           </a:xfrm>
           <a:prstGeom prst="rect">
             <a:avLst/>
@@ -3344,7 +3347,7 @@
                 </a:solidFill>
                 <a:latin typeface="Helvetica"/>
               </a:rPr>
-              <a:t>10 / 15</a:t>
+              <a:t>10 / 18</a:t>
             </a:r>
           </a:p>
         </p:txBody>
@@ -3414,7 +3417,7 @@
                 </a:solidFill>
                 <a:latin typeface="Helvetica"/>
               </a:rPr>
-              <a:t>Test Surface</a:t>
+              <a:t>Mapping &amp; Resolution Strategy</a:t>
             </a:r>
           </a:p>
           <a:p>
@@ -3425,14 +3428,14 @@
                 </a:solidFill>
                 <a:latin typeface="Helvetica"/>
               </a:rPr>
-              <a:t>504 unit tests · 7 workflow YAML · 1 cascade runtime — auto-skip when external deps missing</a:t>
+              <a:t>fast → ancestor → slow → miss; every result carries (path, confidence)</a:t>
             </a:r>
           </a:p>
         </p:txBody>
       </p:sp>
       <p:pic>
         <p:nvPicPr>
-          <p:cNvPr id="3" name="Picture 2" descr="05_test_surface.png"/>
+          <p:cNvPr id="3" name="Picture 2" descr="04_resolution_decision_tree.png"/>
           <p:cNvPicPr>
             <a:picLocks noChangeAspect="1"/>
           </p:cNvPicPr>
@@ -3446,8 +3449,8 @@
         </p:blipFill>
         <p:spPr>
           <a:xfrm>
-            <a:off x="365760" y="914400"/>
-            <a:ext cx="11521440" cy="5969821"/>
+            <a:off x="1828800" y="914400"/>
+            <a:ext cx="8686800" cy="5948840"/>
           </a:xfrm>
           <a:prstGeom prst="rect">
             <a:avLst/>
@@ -3483,7 +3486,7 @@
                 </a:solidFill>
                 <a:latin typeface="Helvetica"/>
               </a:rPr>
-              <a:t>11 / 15</a:t>
+              <a:t>11 / 18</a:t>
             </a:r>
           </a:p>
         </p:txBody>
@@ -3553,7 +3556,7 @@
                 </a:solidFill>
                 <a:latin typeface="Helvetica"/>
               </a:rPr>
-              <a:t>Session Outcome</a:t>
+              <a:t>Ontologies</a:t>
             </a:r>
           </a:p>
           <a:p>
@@ -3564,14 +3567,14 @@
                 </a:solidFill>
                 <a:latin typeface="Helvetica"/>
               </a:rPr>
-              <a:t>12 bugs / drifts uncovered, all fixed and pinned by tests</a:t>
+              <a:t>Authoritative sources tracked in DictionaryEntry.ontology</a:t>
             </a:r>
           </a:p>
         </p:txBody>
       </p:sp>
       <p:pic>
         <p:nvPicPr>
-          <p:cNvPr id="3" name="Picture 2" descr="09_session_bug_count.png"/>
+          <p:cNvPr id="3" name="Picture 2" descr="06_ontologies_coverage.png"/>
           <p:cNvPicPr>
             <a:picLocks noChangeAspect="1"/>
           </p:cNvPicPr>
@@ -3585,8 +3588,8 @@
         </p:blipFill>
         <p:spPr>
           <a:xfrm>
-            <a:off x="640080" y="914400"/>
-            <a:ext cx="10881360" cy="6050437"/>
+            <a:off x="365760" y="914400"/>
+            <a:ext cx="11521440" cy="5025642"/>
           </a:xfrm>
           <a:prstGeom prst="rect">
             <a:avLst/>
@@ -3622,7 +3625,7 @@
                 </a:solidFill>
                 <a:latin typeface="Helvetica"/>
               </a:rPr>
-              <a:t>12 / 15</a:t>
+              <a:t>12 / 18</a:t>
             </a:r>
           </a:p>
         </p:txBody>
@@ -3692,7 +3695,7 @@
                 </a:solidFill>
                 <a:latin typeface="Helvetica"/>
               </a:rPr>
-              <a:t>Things That Will Surprise You</a:t>
+              <a:t>MCP Tool Surface</a:t>
             </a:r>
           </a:p>
           <a:p>
@@ -3703,21 +3706,45 @@
                 </a:solidFill>
                 <a:latin typeface="Helvetica"/>
               </a:rPr>
-              <a:t>Silent-failure shapes you'll hit if you don't know</a:t>
-            </a:r>
-          </a:p>
-        </p:txBody>
-      </p:sp>
-      <p:sp>
-        <p:nvSpPr>
-          <p:cNvPr id="3" name="TextBox 2"/>
+              <a:t>23 tools across 8 groups</a:t>
+            </a:r>
+          </a:p>
+        </p:txBody>
+      </p:sp>
+      <p:pic>
+        <p:nvPicPr>
+          <p:cNvPr id="3" name="Picture 2" descr="07_mcp_tool_distribution.png"/>
+          <p:cNvPicPr>
+            <a:picLocks noChangeAspect="1"/>
+          </p:cNvPicPr>
+          <p:nvPr/>
+        </p:nvPicPr>
+        <p:blipFill>
+          <a:blip r:embed="rId2"/>
+          <a:stretch>
+            <a:fillRect/>
+          </a:stretch>
+        </p:blipFill>
+        <p:spPr>
+          <a:xfrm>
+            <a:off x="640080" y="914400"/>
+            <a:ext cx="10881360" cy="6288462"/>
+          </a:xfrm>
+          <a:prstGeom prst="rect">
+            <a:avLst/>
+          </a:prstGeom>
+        </p:spPr>
+      </p:pic>
+      <p:sp>
+        <p:nvSpPr>
+          <p:cNvPr id="4" name="TextBox 3"/>
           <p:cNvSpPr txBox="1"/>
           <p:nvPr/>
         </p:nvSpPr>
         <p:spPr>
           <a:xfrm>
-            <a:off x="731520" y="1188720"/>
-            <a:ext cx="10972800" cy="5029200"/>
+            <a:off x="10515600" y="6446520"/>
+            <a:ext cx="1554480" cy="365760"/>
           </a:xfrm>
           <a:prstGeom prst="rect">
             <a:avLst/>
@@ -3725,157 +3752,6 @@
           <a:noFill/>
         </p:spPr>
         <p:txBody>
-          <a:bodyPr wrap="square">
-            <a:spAutoFit/>
-          </a:bodyPr>
-          <a:lstStyle/>
-          <a:p>
-            <a:pPr>
-              <a:lnSpc>
-                <a:spcPct val="125000"/>
-              </a:lnSpc>
-            </a:pPr>
-            <a:r>
-              <a:rPr sz="1800">
-                <a:solidFill>
-                  <a:srgbClr val="222222"/>
-                </a:solidFill>
-                <a:latin typeface="Helvetica"/>
-              </a:rPr>
-              <a:t>•  Workflow.process(input) is fire-and-forget — use wait_for_cascade to await</a:t>
-            </a:r>
-          </a:p>
-          <a:p>
-            <a:pPr>
-              <a:lnSpc>
-                <a:spcPct val="125000"/>
-              </a:lnSpc>
-            </a:pPr>
-            <a:r>
-              <a:rPr sz="1800">
-                <a:solidFill>
-                  <a:srgbClr val="222222"/>
-                </a:solidFill>
-                <a:latin typeface="Helvetica"/>
-              </a:rPr>
-              <a:t>•  DirectLink defaults to auto_transfer=False — workflow loads, cascade no-ops</a:t>
-            </a:r>
-          </a:p>
-          <a:p>
-            <a:pPr>
-              <a:lnSpc>
-                <a:spcPct val="125000"/>
-              </a:lnSpc>
-            </a:pPr>
-            <a:r>
-              <a:rPr sz="1800">
-                <a:solidFill>
-                  <a:srgbClr val="222222"/>
-                </a:solidFill>
-                <a:latin typeface="Helvetica"/>
-              </a:rPr>
-              <a:t>•  Workflows need workflow-level input_data_units AND step-level data_units</a:t>
-            </a:r>
-          </a:p>
-          <a:p>
-            <a:pPr>
-              <a:lnSpc>
-                <a:spcPct val="125000"/>
-              </a:lnSpc>
-            </a:pPr>
-            <a:r>
-              <a:rPr sz="1800">
-                <a:solidFill>
-                  <a:srgbClr val="222222"/>
-                </a:solidFill>
-                <a:latin typeface="Helvetica"/>
-              </a:rPr>
-              <a:t>•  Trigger inputs are wrapped {unit_name: payload}; direct callers pass raw</a:t>
-            </a:r>
-          </a:p>
-          <a:p>
-            <a:pPr>
-              <a:lnSpc>
-                <a:spcPct val="125000"/>
-              </a:lnSpc>
-            </a:pPr>
-            <a:r>
-              <a:rPr sz="1800">
-                <a:solidFill>
-                  <a:srgbClr val="222222"/>
-                </a:solidFill>
-                <a:latin typeface="Helvetica"/>
-              </a:rPr>
-              <a:t>•  FAISS / sentence_transformers import order is load-bearing on macOS ARM</a:t>
-            </a:r>
-          </a:p>
-          <a:p>
-            <a:pPr>
-              <a:lnSpc>
-                <a:spcPct val="125000"/>
-              </a:lnSpc>
-            </a:pPr>
-            <a:r>
-              <a:rPr sz="1800">
-                <a:solidFill>
-                  <a:srgbClr val="222222"/>
-                </a:solidFill>
-                <a:latin typeface="Helvetica"/>
-              </a:rPr>
-              <a:t>•  Synthesis branch failures degrade gracefully; all-empty raises ValueError</a:t>
-            </a:r>
-          </a:p>
-          <a:p>
-            <a:pPr>
-              <a:lnSpc>
-                <a:spcPct val="125000"/>
-              </a:lnSpc>
-            </a:pPr>
-            <a:r>
-              <a:rPr sz="1800">
-                <a:solidFill>
-                  <a:srgbClr val="222222"/>
-                </a:solidFill>
-                <a:latin typeface="Helvetica"/>
-              </a:rPr>
-              <a:t>•  Globus Search is read-only at the ingest boundary — harvester is offline</a:t>
-            </a:r>
-          </a:p>
-          <a:p>
-            <a:pPr>
-              <a:lnSpc>
-                <a:spcPct val="125000"/>
-              </a:lnSpc>
-            </a:pPr>
-            <a:r>
-              <a:rPr sz="1800">
-                <a:solidFill>
-                  <a:srgbClr val="222222"/>
-                </a:solidFill>
-                <a:latin typeface="Helvetica"/>
-              </a:rPr>
-              <a:t>•  extra='forbid' is mandatory on every step config (silent typo defense)</a:t>
-            </a:r>
-          </a:p>
-        </p:txBody>
-      </p:sp>
-      <p:sp>
-        <p:nvSpPr>
-          <p:cNvPr id="4" name="TextBox 3"/>
-          <p:cNvSpPr txBox="1"/>
-          <p:nvPr/>
-        </p:nvSpPr>
-        <p:spPr>
-          <a:xfrm>
-            <a:off x="10515600" y="6446520"/>
-            <a:ext cx="1554480" cy="365760"/>
-          </a:xfrm>
-          <a:prstGeom prst="rect">
-            <a:avLst/>
-          </a:prstGeom>
-          <a:noFill/>
-        </p:spPr>
-        <p:txBody>
           <a:bodyPr wrap="none">
             <a:spAutoFit/>
           </a:bodyPr>
@@ -3888,7 +3764,7 @@
                 </a:solidFill>
                 <a:latin typeface="Helvetica"/>
               </a:rPr>
-              <a:t>13 / 15</a:t>
+              <a:t>13 / 18</a:t>
             </a:r>
           </a:p>
         </p:txBody>
@@ -3902,6 +3778,550 @@
 </file>
 
 <file path=ppt/slides/slide14.xml><?xml version="1.0" encoding="utf-8"?>
+<p:sld xmlns:a="http://schemas.openxmlformats.org/drawingml/2006/main" xmlns:p="http://schemas.openxmlformats.org/presentationml/2006/main" xmlns:r="http://schemas.openxmlformats.org/officeDocument/2006/relationships">
+  <p:cSld>
+    <p:spTree>
+      <p:nvGrpSpPr>
+        <p:cNvPr id="1" name=""/>
+        <p:cNvGrpSpPr/>
+        <p:nvPr/>
+      </p:nvGrpSpPr>
+      <p:grpSpPr/>
+      <p:sp>
+        <p:nvSpPr>
+          <p:cNvPr id="2" name="Rectangle 1"/>
+          <p:cNvSpPr/>
+          <p:nvPr/>
+        </p:nvSpPr>
+        <p:spPr>
+          <a:xfrm>
+            <a:off x="0" y="0"/>
+            <a:ext cx="12191695" cy="777240"/>
+          </a:xfrm>
+          <a:prstGeom prst="rect">
+            <a:avLst/>
+          </a:prstGeom>
+          <a:solidFill>
+            <a:srgbClr val="2F4F6F"/>
+          </a:solidFill>
+          <a:ln>
+            <a:noFill/>
+          </a:ln>
+        </p:spPr>
+        <p:style>
+          <a:lnRef idx="1">
+            <a:schemeClr val="accent1"/>
+          </a:lnRef>
+          <a:fillRef idx="3">
+            <a:schemeClr val="accent1"/>
+          </a:fillRef>
+          <a:effectRef idx="2">
+            <a:schemeClr val="accent1"/>
+          </a:effectRef>
+          <a:fontRef idx="minor">
+            <a:schemeClr val="lt1"/>
+          </a:fontRef>
+        </p:style>
+        <p:txBody>
+          <a:bodyPr rtlCol="0" anchor="ctr" lIns="365760" tIns="164592"/>
+          <a:lstStyle/>
+          <a:p>
+            <a:pPr algn="ctr"/>
+            <a:r>
+              <a:rPr sz="2400" b="1">
+                <a:solidFill>
+                  <a:srgbClr val="FFFFFF"/>
+                </a:solidFill>
+                <a:latin typeface="Helvetica"/>
+              </a:rPr>
+              <a:t>Test Surface</a:t>
+            </a:r>
+          </a:p>
+          <a:p>
+            <a:r>
+              <a:rPr sz="1300">
+                <a:solidFill>
+                  <a:srgbClr val="CCD8E5"/>
+                </a:solidFill>
+                <a:latin typeface="Helvetica"/>
+              </a:rPr>
+              <a:t>504 unit tests · 7 workflow YAML · 1 cascade runtime — auto-skip when external deps missing</a:t>
+            </a:r>
+          </a:p>
+        </p:txBody>
+      </p:sp>
+      <p:pic>
+        <p:nvPicPr>
+          <p:cNvPr id="3" name="Picture 2" descr="05_test_surface.png"/>
+          <p:cNvPicPr>
+            <a:picLocks noChangeAspect="1"/>
+          </p:cNvPicPr>
+          <p:nvPr/>
+        </p:nvPicPr>
+        <p:blipFill>
+          <a:blip r:embed="rId2"/>
+          <a:stretch>
+            <a:fillRect/>
+          </a:stretch>
+        </p:blipFill>
+        <p:spPr>
+          <a:xfrm>
+            <a:off x="365760" y="914400"/>
+            <a:ext cx="11521440" cy="5969821"/>
+          </a:xfrm>
+          <a:prstGeom prst="rect">
+            <a:avLst/>
+          </a:prstGeom>
+        </p:spPr>
+      </p:pic>
+      <p:sp>
+        <p:nvSpPr>
+          <p:cNvPr id="4" name="TextBox 3"/>
+          <p:cNvSpPr txBox="1"/>
+          <p:nvPr/>
+        </p:nvSpPr>
+        <p:spPr>
+          <a:xfrm>
+            <a:off x="10515600" y="6446520"/>
+            <a:ext cx="1554480" cy="365760"/>
+          </a:xfrm>
+          <a:prstGeom prst="rect">
+            <a:avLst/>
+          </a:prstGeom>
+          <a:noFill/>
+        </p:spPr>
+        <p:txBody>
+          <a:bodyPr wrap="none">
+            <a:spAutoFit/>
+          </a:bodyPr>
+          <a:lstStyle/>
+          <a:p>
+            <a:r>
+              <a:rPr sz="1000">
+                <a:solidFill>
+                  <a:srgbClr val="666666"/>
+                </a:solidFill>
+                <a:latin typeface="Helvetica"/>
+              </a:rPr>
+              <a:t>14 / 18</a:t>
+            </a:r>
+          </a:p>
+        </p:txBody>
+      </p:sp>
+    </p:spTree>
+  </p:cSld>
+  <p:clrMapOvr>
+    <a:masterClrMapping/>
+  </p:clrMapOvr>
+</p:sld>
+</file>
+
+<file path=ppt/slides/slide15.xml><?xml version="1.0" encoding="utf-8"?>
+<p:sld xmlns:a="http://schemas.openxmlformats.org/drawingml/2006/main" xmlns:p="http://schemas.openxmlformats.org/presentationml/2006/main" xmlns:r="http://schemas.openxmlformats.org/officeDocument/2006/relationships">
+  <p:cSld>
+    <p:spTree>
+      <p:nvGrpSpPr>
+        <p:cNvPr id="1" name=""/>
+        <p:cNvGrpSpPr/>
+        <p:nvPr/>
+      </p:nvGrpSpPr>
+      <p:grpSpPr/>
+      <p:sp>
+        <p:nvSpPr>
+          <p:cNvPr id="2" name="Rectangle 1"/>
+          <p:cNvSpPr/>
+          <p:nvPr/>
+        </p:nvSpPr>
+        <p:spPr>
+          <a:xfrm>
+            <a:off x="0" y="0"/>
+            <a:ext cx="12191695" cy="777240"/>
+          </a:xfrm>
+          <a:prstGeom prst="rect">
+            <a:avLst/>
+          </a:prstGeom>
+          <a:solidFill>
+            <a:srgbClr val="2F4F6F"/>
+          </a:solidFill>
+          <a:ln>
+            <a:noFill/>
+          </a:ln>
+        </p:spPr>
+        <p:style>
+          <a:lnRef idx="1">
+            <a:schemeClr val="accent1"/>
+          </a:lnRef>
+          <a:fillRef idx="3">
+            <a:schemeClr val="accent1"/>
+          </a:fillRef>
+          <a:effectRef idx="2">
+            <a:schemeClr val="accent1"/>
+          </a:effectRef>
+          <a:fontRef idx="minor">
+            <a:schemeClr val="lt1"/>
+          </a:fontRef>
+        </p:style>
+        <p:txBody>
+          <a:bodyPr rtlCol="0" anchor="ctr" lIns="365760" tIns="164592"/>
+          <a:lstStyle/>
+          <a:p>
+            <a:pPr algn="ctr"/>
+            <a:r>
+              <a:rPr sz="2400" b="1">
+                <a:solidFill>
+                  <a:srgbClr val="FFFFFF"/>
+                </a:solidFill>
+                <a:latin typeface="Helvetica"/>
+              </a:rPr>
+              <a:t>Session Outcome</a:t>
+            </a:r>
+          </a:p>
+          <a:p>
+            <a:r>
+              <a:rPr sz="1300">
+                <a:solidFill>
+                  <a:srgbClr val="CCD8E5"/>
+                </a:solidFill>
+                <a:latin typeface="Helvetica"/>
+              </a:rPr>
+              <a:t>12 bugs / drifts uncovered, all fixed and pinned by tests</a:t>
+            </a:r>
+          </a:p>
+        </p:txBody>
+      </p:sp>
+      <p:pic>
+        <p:nvPicPr>
+          <p:cNvPr id="3" name="Picture 2" descr="09_session_bug_count.png"/>
+          <p:cNvPicPr>
+            <a:picLocks noChangeAspect="1"/>
+          </p:cNvPicPr>
+          <p:nvPr/>
+        </p:nvPicPr>
+        <p:blipFill>
+          <a:blip r:embed="rId2"/>
+          <a:stretch>
+            <a:fillRect/>
+          </a:stretch>
+        </p:blipFill>
+        <p:spPr>
+          <a:xfrm>
+            <a:off x="640080" y="914400"/>
+            <a:ext cx="10881360" cy="6050437"/>
+          </a:xfrm>
+          <a:prstGeom prst="rect">
+            <a:avLst/>
+          </a:prstGeom>
+        </p:spPr>
+      </p:pic>
+      <p:sp>
+        <p:nvSpPr>
+          <p:cNvPr id="4" name="TextBox 3"/>
+          <p:cNvSpPr txBox="1"/>
+          <p:nvPr/>
+        </p:nvSpPr>
+        <p:spPr>
+          <a:xfrm>
+            <a:off x="10515600" y="6446520"/>
+            <a:ext cx="1554480" cy="365760"/>
+          </a:xfrm>
+          <a:prstGeom prst="rect">
+            <a:avLst/>
+          </a:prstGeom>
+          <a:noFill/>
+        </p:spPr>
+        <p:txBody>
+          <a:bodyPr wrap="none">
+            <a:spAutoFit/>
+          </a:bodyPr>
+          <a:lstStyle/>
+          <a:p>
+            <a:r>
+              <a:rPr sz="1000">
+                <a:solidFill>
+                  <a:srgbClr val="666666"/>
+                </a:solidFill>
+                <a:latin typeface="Helvetica"/>
+              </a:rPr>
+              <a:t>15 / 18</a:t>
+            </a:r>
+          </a:p>
+        </p:txBody>
+      </p:sp>
+    </p:spTree>
+  </p:cSld>
+  <p:clrMapOvr>
+    <a:masterClrMapping/>
+  </p:clrMapOvr>
+</p:sld>
+</file>
+
+<file path=ppt/slides/slide16.xml><?xml version="1.0" encoding="utf-8"?>
+<p:sld xmlns:a="http://schemas.openxmlformats.org/drawingml/2006/main" xmlns:p="http://schemas.openxmlformats.org/presentationml/2006/main" xmlns:r="http://schemas.openxmlformats.org/officeDocument/2006/relationships">
+  <p:cSld>
+    <p:spTree>
+      <p:nvGrpSpPr>
+        <p:cNvPr id="1" name=""/>
+        <p:cNvGrpSpPr/>
+        <p:nvPr/>
+      </p:nvGrpSpPr>
+      <p:grpSpPr/>
+      <p:sp>
+        <p:nvSpPr>
+          <p:cNvPr id="2" name="Rectangle 1"/>
+          <p:cNvSpPr/>
+          <p:nvPr/>
+        </p:nvSpPr>
+        <p:spPr>
+          <a:xfrm>
+            <a:off x="0" y="0"/>
+            <a:ext cx="12191695" cy="777240"/>
+          </a:xfrm>
+          <a:prstGeom prst="rect">
+            <a:avLst/>
+          </a:prstGeom>
+          <a:solidFill>
+            <a:srgbClr val="2F4F6F"/>
+          </a:solidFill>
+          <a:ln>
+            <a:noFill/>
+          </a:ln>
+        </p:spPr>
+        <p:style>
+          <a:lnRef idx="1">
+            <a:schemeClr val="accent1"/>
+          </a:lnRef>
+          <a:fillRef idx="3">
+            <a:schemeClr val="accent1"/>
+          </a:fillRef>
+          <a:effectRef idx="2">
+            <a:schemeClr val="accent1"/>
+          </a:effectRef>
+          <a:fontRef idx="minor">
+            <a:schemeClr val="lt1"/>
+          </a:fontRef>
+        </p:style>
+        <p:txBody>
+          <a:bodyPr rtlCol="0" anchor="ctr" lIns="365760" tIns="164592"/>
+          <a:lstStyle/>
+          <a:p>
+            <a:pPr algn="ctr"/>
+            <a:r>
+              <a:rPr sz="2400" b="1">
+                <a:solidFill>
+                  <a:srgbClr val="FFFFFF"/>
+                </a:solidFill>
+                <a:latin typeface="Helvetica"/>
+              </a:rPr>
+              <a:t>Things That Will Surprise You</a:t>
+            </a:r>
+          </a:p>
+          <a:p>
+            <a:r>
+              <a:rPr sz="1300">
+                <a:solidFill>
+                  <a:srgbClr val="CCD8E5"/>
+                </a:solidFill>
+                <a:latin typeface="Helvetica"/>
+              </a:rPr>
+              <a:t>Silent-failure shapes you'll hit if you don't know</a:t>
+            </a:r>
+          </a:p>
+        </p:txBody>
+      </p:sp>
+      <p:sp>
+        <p:nvSpPr>
+          <p:cNvPr id="3" name="TextBox 2"/>
+          <p:cNvSpPr txBox="1"/>
+          <p:nvPr/>
+        </p:nvSpPr>
+        <p:spPr>
+          <a:xfrm>
+            <a:off x="731520" y="1188720"/>
+            <a:ext cx="10972800" cy="5029200"/>
+          </a:xfrm>
+          <a:prstGeom prst="rect">
+            <a:avLst/>
+          </a:prstGeom>
+          <a:noFill/>
+        </p:spPr>
+        <p:txBody>
+          <a:bodyPr wrap="square">
+            <a:spAutoFit/>
+          </a:bodyPr>
+          <a:lstStyle/>
+          <a:p>
+            <a:pPr>
+              <a:lnSpc>
+                <a:spcPct val="125000"/>
+              </a:lnSpc>
+            </a:pPr>
+            <a:r>
+              <a:rPr sz="1800">
+                <a:solidFill>
+                  <a:srgbClr val="222222"/>
+                </a:solidFill>
+                <a:latin typeface="Helvetica"/>
+              </a:rPr>
+              <a:t>•  Workflow.process(input) is fire-and-forget — use wait_for_cascade to await</a:t>
+            </a:r>
+          </a:p>
+          <a:p>
+            <a:pPr>
+              <a:lnSpc>
+                <a:spcPct val="125000"/>
+              </a:lnSpc>
+            </a:pPr>
+            <a:r>
+              <a:rPr sz="1800">
+                <a:solidFill>
+                  <a:srgbClr val="222222"/>
+                </a:solidFill>
+                <a:latin typeface="Helvetica"/>
+              </a:rPr>
+              <a:t>•  DirectLink defaults to auto_transfer=False — workflow loads, cascade no-ops</a:t>
+            </a:r>
+          </a:p>
+          <a:p>
+            <a:pPr>
+              <a:lnSpc>
+                <a:spcPct val="125000"/>
+              </a:lnSpc>
+            </a:pPr>
+            <a:r>
+              <a:rPr sz="1800">
+                <a:solidFill>
+                  <a:srgbClr val="222222"/>
+                </a:solidFill>
+                <a:latin typeface="Helvetica"/>
+              </a:rPr>
+              <a:t>•  Workflows need workflow-level input_data_units AND step-level data_units</a:t>
+            </a:r>
+          </a:p>
+          <a:p>
+            <a:pPr>
+              <a:lnSpc>
+                <a:spcPct val="125000"/>
+              </a:lnSpc>
+            </a:pPr>
+            <a:r>
+              <a:rPr sz="1800">
+                <a:solidFill>
+                  <a:srgbClr val="222222"/>
+                </a:solidFill>
+                <a:latin typeface="Helvetica"/>
+              </a:rPr>
+              <a:t>•  Trigger inputs are wrapped {unit_name: payload}; direct callers pass raw</a:t>
+            </a:r>
+          </a:p>
+          <a:p>
+            <a:pPr>
+              <a:lnSpc>
+                <a:spcPct val="125000"/>
+              </a:lnSpc>
+            </a:pPr>
+            <a:r>
+              <a:rPr sz="1800">
+                <a:solidFill>
+                  <a:srgbClr val="222222"/>
+                </a:solidFill>
+                <a:latin typeface="Helvetica"/>
+              </a:rPr>
+              <a:t>•  FAISS / sentence_transformers import order is load-bearing on macOS ARM</a:t>
+            </a:r>
+          </a:p>
+          <a:p>
+            <a:pPr>
+              <a:lnSpc>
+                <a:spcPct val="125000"/>
+              </a:lnSpc>
+            </a:pPr>
+            <a:r>
+              <a:rPr sz="1800">
+                <a:solidFill>
+                  <a:srgbClr val="222222"/>
+                </a:solidFill>
+                <a:latin typeface="Helvetica"/>
+              </a:rPr>
+              <a:t>•  Synthesis branch failures degrade gracefully; all-empty raises ValueError</a:t>
+            </a:r>
+          </a:p>
+          <a:p>
+            <a:pPr>
+              <a:lnSpc>
+                <a:spcPct val="125000"/>
+              </a:lnSpc>
+            </a:pPr>
+            <a:r>
+              <a:rPr sz="1800">
+                <a:solidFill>
+                  <a:srgbClr val="222222"/>
+                </a:solidFill>
+                <a:latin typeface="Helvetica"/>
+              </a:rPr>
+              <a:t>•  Globus Search is read-only at the ingest boundary — harvester is offline</a:t>
+            </a:r>
+          </a:p>
+          <a:p>
+            <a:pPr>
+              <a:lnSpc>
+                <a:spcPct val="125000"/>
+              </a:lnSpc>
+            </a:pPr>
+            <a:r>
+              <a:rPr sz="1800">
+                <a:solidFill>
+                  <a:srgbClr val="222222"/>
+                </a:solidFill>
+                <a:latin typeface="Helvetica"/>
+              </a:rPr>
+              <a:t>•  extra='forbid' is mandatory on every step config (silent typo defense)</a:t>
+            </a:r>
+          </a:p>
+        </p:txBody>
+      </p:sp>
+      <p:sp>
+        <p:nvSpPr>
+          <p:cNvPr id="4" name="TextBox 3"/>
+          <p:cNvSpPr txBox="1"/>
+          <p:nvPr/>
+        </p:nvSpPr>
+        <p:spPr>
+          <a:xfrm>
+            <a:off x="10515600" y="6446520"/>
+            <a:ext cx="1554480" cy="365760"/>
+          </a:xfrm>
+          <a:prstGeom prst="rect">
+            <a:avLst/>
+          </a:prstGeom>
+          <a:noFill/>
+        </p:spPr>
+        <p:txBody>
+          <a:bodyPr wrap="none">
+            <a:spAutoFit/>
+          </a:bodyPr>
+          <a:lstStyle/>
+          <a:p>
+            <a:r>
+              <a:rPr sz="1000">
+                <a:solidFill>
+                  <a:srgbClr val="666666"/>
+                </a:solidFill>
+                <a:latin typeface="Helvetica"/>
+              </a:rPr>
+              <a:t>16 / 18</a:t>
+            </a:r>
+          </a:p>
+        </p:txBody>
+      </p:sp>
+    </p:spTree>
+  </p:cSld>
+  <p:clrMapOvr>
+    <a:masterClrMapping/>
+  </p:clrMapOvr>
+</p:sld>
+</file>
+
+<file path=ppt/slides/slide17.xml><?xml version="1.0" encoding="utf-8"?>
 <p:sld xmlns:a="http://schemas.openxmlformats.org/drawingml/2006/main" xmlns:p="http://schemas.openxmlformats.org/presentationml/2006/main" xmlns:r="http://schemas.openxmlformats.org/officeDocument/2006/relationships">
   <p:cSld>
     <p:spTree>
@@ -4506,7 +4926,7 @@
                 </a:solidFill>
                 <a:latin typeface="Helvetica"/>
               </a:rPr>
-              <a:t>14 / 15</a:t>
+              <a:t>17 / 18</a:t>
             </a:r>
           </a:p>
         </p:txBody>
@@ -4519,7 +4939,7 @@
 </p:sld>
 </file>
 
-<file path=ppt/slides/slide15.xml><?xml version="1.0" encoding="utf-8"?>
+<file path=ppt/slides/slide18.xml><?xml version="1.0" encoding="utf-8"?>
 <p:sld xmlns:a="http://schemas.openxmlformats.org/drawingml/2006/main" xmlns:p="http://schemas.openxmlformats.org/presentationml/2006/main" xmlns:r="http://schemas.openxmlformats.org/officeDocument/2006/relationships">
   <p:cSld>
     <p:spTree>
@@ -4758,7 +5178,7 @@
                 </a:solidFill>
                 <a:latin typeface="Helvetica"/>
               </a:rPr>
-              <a:t>15 / 15</a:t>
+              <a:t>18 / 18</a:t>
             </a:r>
           </a:p>
         </p:txBody>
@@ -4878,7 +5298,7 @@
                 </a:solidFill>
                 <a:latin typeface="Helvetica"/>
               </a:rPr>
-              <a:t>•  Three-tier runtime topology (Tiers 1, 2, 4)</a:t>
+              <a:t>•  Two lifecycles — backend (offline, periodic) vs. user-facing (online, per-query)</a:t>
             </a:r>
           </a:p>
           <a:p>
@@ -4894,7 +5314,7 @@
                 </a:solidFill>
                 <a:latin typeface="Helvetica"/>
               </a:rPr>
-              <a:t>•  Synthesis pipeline — 5 retrieval branches + LLM synthesis</a:t>
+              <a:t>•  Backend harmonization pipeline — harvester + dictionary builder</a:t>
             </a:r>
           </a:p>
           <a:p>
@@ -4910,7 +5330,7 @@
                 </a:solidFill>
                 <a:latin typeface="Helvetica"/>
               </a:rPr>
-              <a:t>•  Three invocation paths (MCP tool · Workflow runtime · direct steps)</a:t>
+              <a:t>•  User-facing query workflow — MCP entry → synthesis → markdown</a:t>
             </a:r>
           </a:p>
           <a:p>
@@ -4926,7 +5346,7 @@
                 </a:solidFill>
                 <a:latin typeface="Helvetica"/>
               </a:rPr>
-              <a:t>•  Trigger-cascade primitive (added 2026-05-05 to nanobrain)</a:t>
+              <a:t>•  Three-tier runtime topology (Tiers 1, 2, 4)</a:t>
             </a:r>
           </a:p>
           <a:p>
@@ -4942,7 +5362,7 @@
                 </a:solidFill>
                 <a:latin typeface="Helvetica"/>
               </a:rPr>
-              <a:t>•  Mapping &amp; resolution strategy — fast / ancestor / slow / miss</a:t>
+              <a:t>•  Synthesis pipeline detail — 5 retrieval branches + LLM</a:t>
             </a:r>
           </a:p>
           <a:p>
@@ -4958,7 +5378,7 @@
                 </a:solidFill>
                 <a:latin typeface="Helvetica"/>
               </a:rPr>
-              <a:t>•  Ontologies — NCBITaxon, VO, DOID, GO, NCBI Gene, APECx Local</a:t>
+              <a:t>•  Trigger-cascade primitive (added 2026-05-05 to nanobrain)</a:t>
             </a:r>
           </a:p>
           <a:p>
@@ -4974,7 +5394,7 @@
                 </a:solidFill>
                 <a:latin typeface="Helvetica"/>
               </a:rPr>
-              <a:t>•  MCP tool surface — 23 tools across 8 groups</a:t>
+              <a:t>•  Mapping &amp; resolution strategy — fast / ancestor / slow / miss</a:t>
             </a:r>
           </a:p>
           <a:p>
@@ -4990,7 +5410,7 @@
                 </a:solidFill>
                 <a:latin typeface="Helvetica"/>
               </a:rPr>
-              <a:t>•  Test surface — 504 unit + workflow YAML + cascade runtime</a:t>
+              <a:t>•  Ontologies, MCP tool surface, test surface</a:t>
             </a:r>
           </a:p>
           <a:p>
@@ -5040,7 +5460,7 @@
                 </a:solidFill>
                 <a:latin typeface="Helvetica"/>
               </a:rPr>
-              <a:t>2 / 15</a:t>
+              <a:t>2 / 18</a:t>
             </a:r>
           </a:p>
         </p:txBody>
@@ -5228,7 +5648,7 @@
                 </a:solidFill>
                 <a:latin typeface="Helvetica"/>
               </a:rPr>
-              <a:t>3 / 15</a:t>
+              <a:t>3 / 18</a:t>
             </a:r>
           </a:p>
         </p:txBody>
@@ -5298,7 +5718,7 @@
                 </a:solidFill>
                 <a:latin typeface="Helvetica"/>
               </a:rPr>
-              <a:t>Three-Tier Runtime Topology</a:t>
+              <a:t>Two Lifecycles, One Bridge</a:t>
             </a:r>
           </a:p>
           <a:p>
@@ -5309,45 +5729,21 @@
                 </a:solidFill>
                 <a:latin typeface="Helvetica"/>
               </a:rPr>
-              <a:t>Tier 1 (this repo) · Tier 2 (Control Plane) · Tier 4 (Executors)</a:t>
-            </a:r>
-          </a:p>
-        </p:txBody>
-      </p:sp>
-      <p:pic>
-        <p:nvPicPr>
-          <p:cNvPr id="3" name="Picture 2" descr="01_three_tier_topology.png"/>
-          <p:cNvPicPr>
-            <a:picLocks noChangeAspect="1"/>
-          </p:cNvPicPr>
-          <p:nvPr/>
-        </p:nvPicPr>
-        <p:blipFill>
-          <a:blip r:embed="rId2"/>
-          <a:stretch>
-            <a:fillRect/>
-          </a:stretch>
-        </p:blipFill>
-        <p:spPr>
-          <a:xfrm>
-            <a:off x="365760" y="914400"/>
-            <a:ext cx="11521440" cy="7317211"/>
-          </a:xfrm>
-          <a:prstGeom prst="rect">
-            <a:avLst/>
-          </a:prstGeom>
-        </p:spPr>
-      </p:pic>
-      <p:sp>
-        <p:nvSpPr>
-          <p:cNvPr id="4" name="TextBox 3"/>
+              <a:t>Backend vs. user-facing — the central organizing distinction</a:t>
+            </a:r>
+          </a:p>
+        </p:txBody>
+      </p:sp>
+      <p:sp>
+        <p:nvSpPr>
+          <p:cNvPr id="3" name="TextBox 2"/>
           <p:cNvSpPr txBox="1"/>
           <p:nvPr/>
         </p:nvSpPr>
         <p:spPr>
           <a:xfrm>
-            <a:off x="10515600" y="6446520"/>
-            <a:ext cx="1554480" cy="365760"/>
+            <a:off x="640080" y="1188720"/>
+            <a:ext cx="5486400" cy="548640"/>
           </a:xfrm>
           <a:prstGeom prst="rect">
             <a:avLst/>
@@ -5355,6 +5751,314 @@
           <a:noFill/>
         </p:spPr>
         <p:txBody>
+          <a:bodyPr wrap="square">
+            <a:spAutoFit/>
+          </a:bodyPr>
+          <a:lstStyle/>
+          <a:p>
+            <a:r>
+              <a:rPr sz="1800" b="1">
+                <a:solidFill>
+                  <a:srgbClr val="D16837"/>
+                </a:solidFill>
+                <a:latin typeface="Helvetica"/>
+              </a:rPr>
+              <a:t>BACKEND HARMONIZATION</a:t>
+            </a:r>
+          </a:p>
+        </p:txBody>
+      </p:sp>
+      <p:sp>
+        <p:nvSpPr>
+          <p:cNvPr id="4" name="TextBox 3"/>
+          <p:cNvSpPr txBox="1"/>
+          <p:nvPr/>
+        </p:nvSpPr>
+        <p:spPr>
+          <a:xfrm>
+            <a:off x="640080" y="1783080"/>
+            <a:ext cx="5486400" cy="4114800"/>
+          </a:xfrm>
+          <a:prstGeom prst="rect">
+            <a:avLst/>
+          </a:prstGeom>
+          <a:noFill/>
+        </p:spPr>
+        <p:txBody>
+          <a:bodyPr wrap="square">
+            <a:spAutoFit/>
+          </a:bodyPr>
+          <a:lstStyle/>
+          <a:p>
+            <a:pPr>
+              <a:lnSpc>
+                <a:spcPct val="125000"/>
+              </a:lnSpc>
+            </a:pPr>
+            <a:r>
+              <a:rPr sz="1400">
+                <a:solidFill>
+                  <a:srgbClr val="222222"/>
+                </a:solidFill>
+                <a:latin typeface="Helvetica"/>
+              </a:rPr>
+              <a:t>•  Run periodically (e.g. monthly)</a:t>
+            </a:r>
+          </a:p>
+          <a:p>
+            <a:pPr>
+              <a:lnSpc>
+                <a:spcPct val="125000"/>
+              </a:lnSpc>
+            </a:pPr>
+            <a:r>
+              <a:rPr sz="1400">
+                <a:solidFill>
+                  <a:srgbClr val="222222"/>
+                </a:solidFill>
+                <a:latin typeface="Helvetica"/>
+              </a:rPr>
+              <a:t>•  Two pipelines: harvester (apecx-harvesters) + dictionary builder (this repo)</a:t>
+            </a:r>
+          </a:p>
+          <a:p>
+            <a:pPr>
+              <a:lnSpc>
+                <a:spcPct val="125000"/>
+              </a:lnSpc>
+            </a:pPr>
+            <a:r>
+              <a:rPr sz="1400">
+                <a:solidFill>
+                  <a:srgbClr val="222222"/>
+                </a:solidFill>
+                <a:latin typeface="Helvetica"/>
+              </a:rPr>
+              <a:t>•  Writes Globus Search index + apecx_synonym_dict.sqlite</a:t>
+            </a:r>
+          </a:p>
+          <a:p>
+            <a:pPr>
+              <a:lnSpc>
+                <a:spcPct val="125000"/>
+              </a:lnSpc>
+            </a:pPr>
+            <a:r>
+              <a:rPr sz="1400">
+                <a:solidFill>
+                  <a:srgbClr val="222222"/>
+                </a:solidFill>
+                <a:latin typeface="Helvetica"/>
+              </a:rPr>
+              <a:t>•  Synchronous, batch, NOT on the per-query hot path</a:t>
+            </a:r>
+          </a:p>
+          <a:p>
+            <a:pPr>
+              <a:lnSpc>
+                <a:spcPct val="125000"/>
+              </a:lnSpc>
+            </a:pPr>
+            <a:r>
+              <a:rPr sz="1400">
+                <a:solidFill>
+                  <a:srgbClr val="222222"/>
+                </a:solidFill>
+                <a:latin typeface="Helvetica"/>
+              </a:rPr>
+              <a:t>•  Sources: PubMed, PDB, DataCite, Crossref, OpenAlex, bioRxiv, EMDB, DOI, VIOLIN, BV-BRC, NCBI taxdump</a:t>
+            </a:r>
+          </a:p>
+        </p:txBody>
+      </p:sp>
+      <p:sp>
+        <p:nvSpPr>
+          <p:cNvPr id="5" name="TextBox 4"/>
+          <p:cNvSpPr txBox="1"/>
+          <p:nvPr/>
+        </p:nvSpPr>
+        <p:spPr>
+          <a:xfrm>
+            <a:off x="6400800" y="1188720"/>
+            <a:ext cx="5486400" cy="548640"/>
+          </a:xfrm>
+          <a:prstGeom prst="rect">
+            <a:avLst/>
+          </a:prstGeom>
+          <a:noFill/>
+        </p:spPr>
+        <p:txBody>
+          <a:bodyPr wrap="square">
+            <a:spAutoFit/>
+          </a:bodyPr>
+          <a:lstStyle/>
+          <a:p>
+            <a:r>
+              <a:rPr sz="1800" b="1">
+                <a:solidFill>
+                  <a:srgbClr val="3060A0"/>
+                </a:solidFill>
+                <a:latin typeface="Helvetica"/>
+              </a:rPr>
+              <a:t>USER-FACING WORKFLOW</a:t>
+            </a:r>
+          </a:p>
+        </p:txBody>
+      </p:sp>
+      <p:sp>
+        <p:nvSpPr>
+          <p:cNvPr id="6" name="TextBox 5"/>
+          <p:cNvSpPr txBox="1"/>
+          <p:nvPr/>
+        </p:nvSpPr>
+        <p:spPr>
+          <a:xfrm>
+            <a:off x="6400800" y="1783080"/>
+            <a:ext cx="5486400" cy="4114800"/>
+          </a:xfrm>
+          <a:prstGeom prst="rect">
+            <a:avLst/>
+          </a:prstGeom>
+          <a:noFill/>
+        </p:spPr>
+        <p:txBody>
+          <a:bodyPr wrap="square">
+            <a:spAutoFit/>
+          </a:bodyPr>
+          <a:lstStyle/>
+          <a:p>
+            <a:pPr>
+              <a:lnSpc>
+                <a:spcPct val="125000"/>
+              </a:lnSpc>
+            </a:pPr>
+            <a:r>
+              <a:rPr sz="1400">
+                <a:solidFill>
+                  <a:srgbClr val="222222"/>
+                </a:solidFill>
+                <a:latin typeface="Helvetica"/>
+              </a:rPr>
+              <a:t>•  Per scientist query (~70s wall-clock on Ollama)</a:t>
+            </a:r>
+          </a:p>
+          <a:p>
+            <a:pPr>
+              <a:lnSpc>
+                <a:spcPct val="125000"/>
+              </a:lnSpc>
+            </a:pPr>
+            <a:r>
+              <a:rPr sz="1400">
+                <a:solidFill>
+                  <a:srgbClr val="222222"/>
+                </a:solidFill>
+                <a:latin typeface="Helvetica"/>
+              </a:rPr>
+              <a:t>•  MCP server → synthesize_query → 4 retrieval branches → LLM</a:t>
+            </a:r>
+          </a:p>
+          <a:p>
+            <a:pPr>
+              <a:lnSpc>
+                <a:spcPct val="125000"/>
+              </a:lnSpc>
+            </a:pPr>
+            <a:r>
+              <a:rPr sz="1400">
+                <a:solidFill>
+                  <a:srgbClr val="222222"/>
+                </a:solidFill>
+                <a:latin typeface="Helvetica"/>
+              </a:rPr>
+              <a:t>•  Reads the artifacts the backend wrote — never writes back</a:t>
+            </a:r>
+          </a:p>
+          <a:p>
+            <a:pPr>
+              <a:lnSpc>
+                <a:spcPct val="125000"/>
+              </a:lnSpc>
+            </a:pPr>
+            <a:r>
+              <a:rPr sz="1400">
+                <a:solidFill>
+                  <a:srgbClr val="222222"/>
+                </a:solidFill>
+                <a:latin typeface="Helvetica"/>
+              </a:rPr>
+              <a:t>•  Real-time, async, fail-soft branch failures</a:t>
+            </a:r>
+          </a:p>
+          <a:p>
+            <a:pPr>
+              <a:lnSpc>
+                <a:spcPct val="125000"/>
+              </a:lnSpc>
+            </a:pPr>
+            <a:r>
+              <a:rPr sz="1400">
+                <a:solidFill>
+                  <a:srgbClr val="222222"/>
+                </a:solidFill>
+                <a:latin typeface="Helvetica"/>
+              </a:rPr>
+              <a:t>•  Globus + FAISS + VIOLIN/BV-BRC + PubMed + (synonym dict for fast-path resolution)</a:t>
+            </a:r>
+          </a:p>
+        </p:txBody>
+      </p:sp>
+      <p:sp>
+        <p:nvSpPr>
+          <p:cNvPr id="7" name="TextBox 6"/>
+          <p:cNvSpPr txBox="1"/>
+          <p:nvPr/>
+        </p:nvSpPr>
+        <p:spPr>
+          <a:xfrm>
+            <a:off x="640080" y="5760720"/>
+            <a:ext cx="10972800" cy="640080"/>
+          </a:xfrm>
+          <a:prstGeom prst="rect">
+            <a:avLst/>
+          </a:prstGeom>
+          <a:noFill/>
+        </p:spPr>
+        <p:txBody>
+          <a:bodyPr wrap="square">
+            <a:spAutoFit/>
+          </a:bodyPr>
+          <a:lstStyle/>
+          <a:p>
+            <a:r>
+              <a:rPr sz="1500" b="1">
+                <a:solidFill>
+                  <a:srgbClr val="222222"/>
+                </a:solidFill>
+                <a:latin typeface="Helvetica"/>
+              </a:rPr>
+              <a:t>Bridge: every artifact the backend writes, the user-facing workflow reads — and never writes to.</a:t>
+            </a:r>
+          </a:p>
+        </p:txBody>
+      </p:sp>
+      <p:sp>
+        <p:nvSpPr>
+          <p:cNvPr id="8" name="TextBox 7"/>
+          <p:cNvSpPr txBox="1"/>
+          <p:nvPr/>
+        </p:nvSpPr>
+        <p:spPr>
+          <a:xfrm>
+            <a:off x="10515600" y="6446520"/>
+            <a:ext cx="1554480" cy="365760"/>
+          </a:xfrm>
+          <a:prstGeom prst="rect">
+            <a:avLst/>
+          </a:prstGeom>
+          <a:noFill/>
+        </p:spPr>
+        <p:txBody>
           <a:bodyPr wrap="none">
             <a:spAutoFit/>
           </a:bodyPr>
@@ -5367,7 +6071,7 @@
                 </a:solidFill>
                 <a:latin typeface="Helvetica"/>
               </a:rPr>
-              <a:t>4 / 15</a:t>
+              <a:t>4 / 18</a:t>
             </a:r>
           </a:p>
         </p:txBody>
@@ -5437,7 +6141,7 @@
                 </a:solidFill>
                 <a:latin typeface="Helvetica"/>
               </a:rPr>
-              <a:t>Synthesis Pipeline</a:t>
+              <a:t>Backend Harmonization Pipeline</a:t>
             </a:r>
           </a:p>
           <a:p>
@@ -5448,14 +6152,14 @@
                 </a:solidFill>
                 <a:latin typeface="Helvetica"/>
               </a:rPr>
-              <a:t>5 concurrent retrieval branches → 1 LLM round-trip → grounded Markdown</a:t>
+              <a:t>Offline · run periodically · harvester (apecx-harvesters) + dictionary builder (this repo)</a:t>
             </a:r>
           </a:p>
         </p:txBody>
       </p:sp>
       <p:pic>
         <p:nvPicPr>
-          <p:cNvPr id="3" name="Picture 2" descr="02_synthesis_pipeline.png"/>
+          <p:cNvPr id="3" name="Picture 2" descr="10_backend_harmonization.png"/>
           <p:cNvPicPr>
             <a:picLocks noChangeAspect="1"/>
           </p:cNvPicPr>
@@ -5470,7 +6174,7 @@
         <p:spPr>
           <a:xfrm>
             <a:off x="365760" y="914400"/>
-            <a:ext cx="11521440" cy="6571849"/>
+            <a:ext cx="11521440" cy="7468477"/>
           </a:xfrm>
           <a:prstGeom prst="rect">
             <a:avLst/>
@@ -5506,7 +6210,7 @@
                 </a:solidFill>
                 <a:latin typeface="Helvetica"/>
               </a:rPr>
-              <a:t>5 / 15</a:t>
+              <a:t>5 / 18</a:t>
             </a:r>
           </a:p>
         </p:txBody>
@@ -5576,7 +6280,7 @@
                 </a:solidFill>
                 <a:latin typeface="Helvetica"/>
               </a:rPr>
-              <a:t>Three Invocation Paths</a:t>
+              <a:t>User-Facing Workflow</a:t>
             </a:r>
           </a:p>
           <a:p>
@@ -5587,14 +6291,14 @@
                 </a:solidFill>
                 <a:latin typeface="Helvetica"/>
               </a:rPr>
-              <a:t>Pick one based on the calling context</a:t>
+              <a:t>Online · per-query · ~70s wall-clock · 3 bands (MCP entry → synthesis → artifacts read)</a:t>
             </a:r>
           </a:p>
         </p:txBody>
       </p:sp>
       <p:pic>
         <p:nvPicPr>
-          <p:cNvPr id="3" name="Picture 2" descr="03_invocation_paths.png"/>
+          <p:cNvPr id="3" name="Picture 2" descr="11_user_facing_workflow.png"/>
           <p:cNvPicPr>
             <a:picLocks noChangeAspect="1"/>
           </p:cNvPicPr>
@@ -5609,7 +6313,7 @@
         <p:spPr>
           <a:xfrm>
             <a:off x="365760" y="914400"/>
-            <a:ext cx="11521440" cy="5830802"/>
+            <a:ext cx="11521440" cy="7468477"/>
           </a:xfrm>
           <a:prstGeom prst="rect">
             <a:avLst/>
@@ -5645,7 +6349,7 @@
                 </a:solidFill>
                 <a:latin typeface="Helvetica"/>
               </a:rPr>
-              <a:t>6 / 15</a:t>
+              <a:t>6 / 18</a:t>
             </a:r>
           </a:p>
         </p:txBody>
@@ -5715,7 +6419,7 @@
                 </a:solidFill>
                 <a:latin typeface="Helvetica"/>
               </a:rPr>
-              <a:t>Workflow.wait_for_cascade</a:t>
+              <a:t>Three-Tier Runtime Topology</a:t>
             </a:r>
           </a:p>
           <a:p>
@@ -5726,14 +6430,14 @@
                 </a:solidFill>
                 <a:latin typeface="Helvetica"/>
               </a:rPr>
-              <a:t>Added to nanobrain 2026-05-05 — drains the trigger executor's task set with a settle window</a:t>
+              <a:t>Tier 1 (this repo) · Tier 2 (Control Plane) · Tier 4 (Executors)</a:t>
             </a:r>
           </a:p>
         </p:txBody>
       </p:sp>
       <p:pic>
         <p:nvPicPr>
-          <p:cNvPr id="3" name="Picture 2" descr="08_trigger_cascade_timeline.png"/>
+          <p:cNvPr id="3" name="Picture 2" descr="01_three_tier_topology.png"/>
           <p:cNvPicPr>
             <a:picLocks noChangeAspect="1"/>
           </p:cNvPicPr>
@@ -5748,7 +6452,7 @@
         <p:spPr>
           <a:xfrm>
             <a:off x="365760" y="914400"/>
-            <a:ext cx="11521440" cy="7994926"/>
+            <a:ext cx="11521440" cy="7317211"/>
           </a:xfrm>
           <a:prstGeom prst="rect">
             <a:avLst/>
@@ -5784,7 +6488,7 @@
                 </a:solidFill>
                 <a:latin typeface="Helvetica"/>
               </a:rPr>
-              <a:t>7 / 15</a:t>
+              <a:t>7 / 18</a:t>
             </a:r>
           </a:p>
         </p:txBody>
@@ -5854,7 +6558,7 @@
                 </a:solidFill>
                 <a:latin typeface="Helvetica"/>
               </a:rPr>
-              <a:t>Mapping &amp; Resolution Strategy</a:t>
+              <a:t>Synthesis Pipeline</a:t>
             </a:r>
           </a:p>
           <a:p>
@@ -5865,14 +6569,14 @@
                 </a:solidFill>
                 <a:latin typeface="Helvetica"/>
               </a:rPr>
-              <a:t>fast → ancestor → slow → miss; every result carries (path, confidence)</a:t>
+              <a:t>5 concurrent retrieval branches → 1 LLM round-trip → grounded Markdown</a:t>
             </a:r>
           </a:p>
         </p:txBody>
       </p:sp>
       <p:pic>
         <p:nvPicPr>
-          <p:cNvPr id="3" name="Picture 2" descr="04_resolution_decision_tree.png"/>
+          <p:cNvPr id="3" name="Picture 2" descr="02_synthesis_pipeline.png"/>
           <p:cNvPicPr>
             <a:picLocks noChangeAspect="1"/>
           </p:cNvPicPr>
@@ -5886,8 +6590,8 @@
         </p:blipFill>
         <p:spPr>
           <a:xfrm>
-            <a:off x="1828800" y="914400"/>
-            <a:ext cx="8686800" cy="5948840"/>
+            <a:off x="365760" y="914400"/>
+            <a:ext cx="11521440" cy="6571849"/>
           </a:xfrm>
           <a:prstGeom prst="rect">
             <a:avLst/>
@@ -5923,7 +6627,7 @@
                 </a:solidFill>
                 <a:latin typeface="Helvetica"/>
               </a:rPr>
-              <a:t>8 / 15</a:t>
+              <a:t>8 / 18</a:t>
             </a:r>
           </a:p>
         </p:txBody>
@@ -5993,7 +6697,7 @@
                 </a:solidFill>
                 <a:latin typeface="Helvetica"/>
               </a:rPr>
-              <a:t>Ontologies</a:t>
+              <a:t>Three Invocation Paths</a:t>
             </a:r>
           </a:p>
           <a:p>
@@ -6004,14 +6708,14 @@
                 </a:solidFill>
                 <a:latin typeface="Helvetica"/>
               </a:rPr>
-              <a:t>Authoritative sources tracked in DictionaryEntry.ontology</a:t>
+              <a:t>Pick one based on the calling context</a:t>
             </a:r>
           </a:p>
         </p:txBody>
       </p:sp>
       <p:pic>
         <p:nvPicPr>
-          <p:cNvPr id="3" name="Picture 2" descr="06_ontologies_coverage.png"/>
+          <p:cNvPr id="3" name="Picture 2" descr="03_invocation_paths.png"/>
           <p:cNvPicPr>
             <a:picLocks noChangeAspect="1"/>
           </p:cNvPicPr>
@@ -6026,7 +6730,7 @@
         <p:spPr>
           <a:xfrm>
             <a:off x="365760" y="914400"/>
-            <a:ext cx="11521440" cy="5025642"/>
+            <a:ext cx="11521440" cy="5830802"/>
           </a:xfrm>
           <a:prstGeom prst="rect">
             <a:avLst/>
@@ -6062,7 +6766,7 @@
                 </a:solidFill>
                 <a:latin typeface="Helvetica"/>
               </a:rPr>
-              <a:t>9 / 15</a:t>
+              <a:t>9 / 18</a:t>
             </a:r>
           </a:p>
         </p:txBody>

--- a/docs/architecture_slides.pptx
+++ b/docs/architecture_slides.pptx
@@ -23,6 +23,9 @@
     <p:sldId id="271" r:id="rId22"/>
     <p:sldId id="272" r:id="rId23"/>
     <p:sldId id="273" r:id="rId24"/>
+    <p:sldId id="274" r:id="rId25"/>
+    <p:sldId id="275" r:id="rId26"/>
+    <p:sldId id="276" r:id="rId27"/>
   </p:sldIdLst>
   <p:sldSz cx="12191695" cy="6858000" type="screen4x3"/>
   <p:notesSz cx="6858000" cy="9144000"/>
@@ -3347,7 +3350,7 @@
                 </a:solidFill>
                 <a:latin typeface="Helvetica"/>
               </a:rPr>
-              <a:t>10 / 18</a:t>
+              <a:t>10 / 21</a:t>
             </a:r>
           </a:p>
         </p:txBody>
@@ -3486,7 +3489,7 @@
                 </a:solidFill>
                 <a:latin typeface="Helvetica"/>
               </a:rPr>
-              <a:t>11 / 18</a:t>
+              <a:t>11 / 21</a:t>
             </a:r>
           </a:p>
         </p:txBody>
@@ -3625,7 +3628,7 @@
                 </a:solidFill>
                 <a:latin typeface="Helvetica"/>
               </a:rPr>
-              <a:t>12 / 18</a:t>
+              <a:t>12 / 21</a:t>
             </a:r>
           </a:p>
         </p:txBody>
@@ -3764,7 +3767,7 @@
                 </a:solidFill>
                 <a:latin typeface="Helvetica"/>
               </a:rPr>
-              <a:t>13 / 18</a:t>
+              <a:t>13 / 21</a:t>
             </a:r>
           </a:p>
         </p:txBody>
@@ -3903,7 +3906,7 @@
                 </a:solidFill>
                 <a:latin typeface="Helvetica"/>
               </a:rPr>
-              <a:t>14 / 18</a:t>
+              <a:t>14 / 21</a:t>
             </a:r>
           </a:p>
         </p:txBody>
@@ -3973,7 +3976,7 @@
                 </a:solidFill>
                 <a:latin typeface="Helvetica"/>
               </a:rPr>
-              <a:t>Session Outcome</a:t>
+              <a:t>Data Quality Assessment</a:t>
             </a:r>
           </a:p>
           <a:p>
@@ -3984,45 +3987,21 @@
                 </a:solidFill>
                 <a:latin typeface="Helvetica"/>
               </a:rPr>
-              <a:t>12 bugs / drifts uncovered, all fixed and pinned by tests</a:t>
-            </a:r>
-          </a:p>
-        </p:txBody>
-      </p:sp>
-      <p:pic>
-        <p:nvPicPr>
-          <p:cNvPr id="3" name="Picture 2" descr="09_session_bug_count.png"/>
-          <p:cNvPicPr>
-            <a:picLocks noChangeAspect="1"/>
-          </p:cNvPicPr>
-          <p:nvPr/>
-        </p:nvPicPr>
-        <p:blipFill>
-          <a:blip r:embed="rId2"/>
-          <a:stretch>
-            <a:fillRect/>
-          </a:stretch>
-        </p:blipFill>
-        <p:spPr>
-          <a:xfrm>
-            <a:off x="640080" y="914400"/>
-            <a:ext cx="10881360" cy="6050437"/>
-          </a:xfrm>
-          <a:prstGeom prst="rect">
-            <a:avLst/>
-          </a:prstGeom>
-        </p:spPr>
-      </p:pic>
-      <p:sp>
-        <p:nvSpPr>
-          <p:cNvPr id="4" name="TextBox 3"/>
+              <a:t>Three-test pattern · CI-enforced floors · live-OLS gating, no mocks</a:t>
+            </a:r>
+          </a:p>
+        </p:txBody>
+      </p:sp>
+      <p:sp>
+        <p:nvSpPr>
+          <p:cNvPr id="3" name="TextBox 2"/>
           <p:cNvSpPr txBox="1"/>
           <p:nvPr/>
         </p:nvSpPr>
         <p:spPr>
           <a:xfrm>
-            <a:off x="10515600" y="6446520"/>
-            <a:ext cx="1554480" cy="365760"/>
+            <a:off x="640080" y="1143000"/>
+            <a:ext cx="10972800" cy="5120640"/>
           </a:xfrm>
           <a:prstGeom prst="rect">
             <a:avLst/>
@@ -4030,6 +4009,125 @@
           <a:noFill/>
         </p:spPr>
         <p:txBody>
+          <a:bodyPr wrap="square">
+            <a:spAutoFit/>
+          </a:bodyPr>
+          <a:lstStyle/>
+          <a:p>
+            <a:pPr>
+              <a:lnSpc>
+                <a:spcPct val="130000"/>
+              </a:lnSpc>
+            </a:pPr>
+            <a:r>
+              <a:rPr sz="1500">
+                <a:solidFill>
+                  <a:srgbClr val="222222"/>
+                </a:solidFill>
+                <a:latin typeface="Helvetica"/>
+              </a:rPr>
+              <a:t>•  AccuracyMetrics — recall + precision + F1 from confusion-matrix counts (correct / incorrect / ground-truth total)</a:t>
+            </a:r>
+          </a:p>
+          <a:p>
+            <a:pPr>
+              <a:lnSpc>
+                <a:spcPct val="130000"/>
+              </a:lnSpc>
+            </a:pPr>
+            <a:r>
+              <a:rPr sz="1500">
+                <a:solidFill>
+                  <a:srgbClr val="222222"/>
+                </a:solidFill>
+                <a:latin typeface="Helvetica"/>
+              </a:rPr>
+              <a:t>•  Three-test pattern: slice baseline (60-row deterministic sample, fast feedback) → full corpus (all 13,238 rows, gated by APECX_SYNONYM_DICT_FULL_CORPUS=1) → probe-batch sampling (50 / 300 spot-checks at the boundary)</a:t>
+            </a:r>
+          </a:p>
+          <a:p>
+            <a:pPr>
+              <a:lnSpc>
+                <a:spcPct val="130000"/>
+              </a:lnSpc>
+            </a:pPr>
+            <a:r>
+              <a:rPr sz="1500">
+                <a:solidFill>
+                  <a:srgbClr val="222222"/>
+                </a:solidFill>
+                <a:latin typeface="Helvetica"/>
+              </a:rPr>
+              <a:t>•  Live OLS gating — APECX_SYNONYM_DICT_LIVE_OLS=1 required; tests auto-skip when the resolver is unreachable rather than mocking it (workspace mocks-only-for-smoke rule)</a:t>
+            </a:r>
+          </a:p>
+          <a:p>
+            <a:pPr>
+              <a:lnSpc>
+                <a:spcPct val="130000"/>
+              </a:lnSpc>
+            </a:pPr>
+            <a:r>
+              <a:rPr sz="1500">
+                <a:solidFill>
+                  <a:srgbClr val="222222"/>
+                </a:solidFill>
+                <a:latin typeface="Helvetica"/>
+              </a:rPr>
+              <a:t>•  Per-class enforcement: Pathogen (R≥0.90, P≥0.95, F1≥0.92), Vaccine (R≥0.75, P≥0.85), Gene (R≥0.65, P≥0.95), Disease (search-only — no recall floor)</a:t>
+            </a:r>
+          </a:p>
+          <a:p>
+            <a:pPr>
+              <a:lnSpc>
+                <a:spcPct val="130000"/>
+              </a:lnSpc>
+            </a:pPr>
+            <a:r>
+              <a:rPr sz="1500">
+                <a:solidFill>
+                  <a:srgbClr val="222222"/>
+                </a:solidFill>
+                <a:latin typeface="Helvetica"/>
+              </a:rPr>
+              <a:t>•  Floors are LOWER BOUNDS, not target observed values — a build that misses any floor fails CI</a:t>
+            </a:r>
+          </a:p>
+          <a:p>
+            <a:pPr>
+              <a:lnSpc>
+                <a:spcPct val="130000"/>
+              </a:lnSpc>
+            </a:pPr>
+            <a:r>
+              <a:rPr sz="1500">
+                <a:solidFill>
+                  <a:srgbClr val="222222"/>
+                </a:solidFill>
+                <a:latin typeface="Helvetica"/>
+              </a:rPr>
+              <a:t>•  Source of truth: tests/integration/test_synonym_accuracy.py (behavior pinned by tests/unit/test_metrics_invariants.py)</a:t>
+            </a:r>
+          </a:p>
+        </p:txBody>
+      </p:sp>
+      <p:sp>
+        <p:nvSpPr>
+          <p:cNvPr id="4" name="TextBox 3"/>
+          <p:cNvSpPr txBox="1"/>
+          <p:nvPr/>
+        </p:nvSpPr>
+        <p:spPr>
+          <a:xfrm>
+            <a:off x="10515600" y="6446520"/>
+            <a:ext cx="1554480" cy="365760"/>
+          </a:xfrm>
+          <a:prstGeom prst="rect">
+            <a:avLst/>
+          </a:prstGeom>
+          <a:noFill/>
+        </p:spPr>
+        <p:txBody>
           <a:bodyPr wrap="none">
             <a:spAutoFit/>
           </a:bodyPr>
@@ -4042,7 +4140,7 @@
                 </a:solidFill>
                 <a:latin typeface="Helvetica"/>
               </a:rPr>
-              <a:t>15 / 18</a:t>
+              <a:t>15 / 21</a:t>
             </a:r>
           </a:p>
         </p:txBody>
@@ -4112,7 +4210,7 @@
                 </a:solidFill>
                 <a:latin typeface="Helvetica"/>
               </a:rPr>
-              <a:t>Things That Will Surprise You</a:t>
+              <a:t>Accuracy Floors per Entity Class</a:t>
             </a:r>
           </a:p>
           <a:p>
@@ -4123,21 +4221,45 @@
                 </a:solidFill>
                 <a:latin typeface="Helvetica"/>
               </a:rPr>
-              <a:t>Silent-failure shapes you'll hit if you don't know</a:t>
-            </a:r>
-          </a:p>
-        </p:txBody>
-      </p:sp>
-      <p:sp>
-        <p:nvSpPr>
-          <p:cNvPr id="3" name="TextBox 2"/>
+              <a:t>Slice baseline (60 rows) vs. full-corpus floor — both CI-enforced; bars are lower bounds, not observed values</a:t>
+            </a:r>
+          </a:p>
+        </p:txBody>
+      </p:sp>
+      <p:pic>
+        <p:nvPicPr>
+          <p:cNvPr id="3" name="Picture 2" descr="12_accuracy_thresholds.png"/>
+          <p:cNvPicPr>
+            <a:picLocks noChangeAspect="1"/>
+          </p:cNvPicPr>
+          <p:nvPr/>
+        </p:nvPicPr>
+        <p:blipFill>
+          <a:blip r:embed="rId2"/>
+          <a:stretch>
+            <a:fillRect/>
+          </a:stretch>
+        </p:blipFill>
+        <p:spPr>
+          <a:xfrm>
+            <a:off x="365760" y="914400"/>
+            <a:ext cx="11521440" cy="4534044"/>
+          </a:xfrm>
+          <a:prstGeom prst="rect">
+            <a:avLst/>
+          </a:prstGeom>
+        </p:spPr>
+      </p:pic>
+      <p:sp>
+        <p:nvSpPr>
+          <p:cNvPr id="4" name="TextBox 3"/>
           <p:cNvSpPr txBox="1"/>
           <p:nvPr/>
         </p:nvSpPr>
         <p:spPr>
           <a:xfrm>
-            <a:off x="731520" y="1188720"/>
-            <a:ext cx="10972800" cy="5029200"/>
+            <a:off x="640080" y="5943600"/>
+            <a:ext cx="10972800" cy="548640"/>
           </a:xfrm>
           <a:prstGeom prst="rect">
             <a:avLst/>
@@ -4150,138 +4272,21 @@
           </a:bodyPr>
           <a:lstStyle/>
           <a:p>
-            <a:pPr>
-              <a:lnSpc>
-                <a:spcPct val="125000"/>
-              </a:lnSpc>
-            </a:pPr>
-            <a:r>
-              <a:rPr sz="1800">
-                <a:solidFill>
-                  <a:srgbClr val="222222"/>
-                </a:solidFill>
-                <a:latin typeface="Helvetica"/>
-              </a:rPr>
-              <a:t>•  Workflow.process(input) is fire-and-forget — use wait_for_cascade to await</a:t>
-            </a:r>
-          </a:p>
-          <a:p>
-            <a:pPr>
-              <a:lnSpc>
-                <a:spcPct val="125000"/>
-              </a:lnSpc>
-            </a:pPr>
-            <a:r>
-              <a:rPr sz="1800">
-                <a:solidFill>
-                  <a:srgbClr val="222222"/>
-                </a:solidFill>
-                <a:latin typeface="Helvetica"/>
-              </a:rPr>
-              <a:t>•  DirectLink defaults to auto_transfer=False — workflow loads, cascade no-ops</a:t>
-            </a:r>
-          </a:p>
-          <a:p>
-            <a:pPr>
-              <a:lnSpc>
-                <a:spcPct val="125000"/>
-              </a:lnSpc>
-            </a:pPr>
-            <a:r>
-              <a:rPr sz="1800">
-                <a:solidFill>
-                  <a:srgbClr val="222222"/>
-                </a:solidFill>
-                <a:latin typeface="Helvetica"/>
-              </a:rPr>
-              <a:t>•  Workflows need workflow-level input_data_units AND step-level data_units</a:t>
-            </a:r>
-          </a:p>
-          <a:p>
-            <a:pPr>
-              <a:lnSpc>
-                <a:spcPct val="125000"/>
-              </a:lnSpc>
-            </a:pPr>
-            <a:r>
-              <a:rPr sz="1800">
-                <a:solidFill>
-                  <a:srgbClr val="222222"/>
-                </a:solidFill>
-                <a:latin typeface="Helvetica"/>
-              </a:rPr>
-              <a:t>•  Trigger inputs are wrapped {unit_name: payload}; direct callers pass raw</a:t>
-            </a:r>
-          </a:p>
-          <a:p>
-            <a:pPr>
-              <a:lnSpc>
-                <a:spcPct val="125000"/>
-              </a:lnSpc>
-            </a:pPr>
-            <a:r>
-              <a:rPr sz="1800">
-                <a:solidFill>
-                  <a:srgbClr val="222222"/>
-                </a:solidFill>
-                <a:latin typeface="Helvetica"/>
-              </a:rPr>
-              <a:t>•  FAISS / sentence_transformers import order is load-bearing on macOS ARM</a:t>
-            </a:r>
-          </a:p>
-          <a:p>
-            <a:pPr>
-              <a:lnSpc>
-                <a:spcPct val="125000"/>
-              </a:lnSpc>
-            </a:pPr>
-            <a:r>
-              <a:rPr sz="1800">
-                <a:solidFill>
-                  <a:srgbClr val="222222"/>
-                </a:solidFill>
-                <a:latin typeface="Helvetica"/>
-              </a:rPr>
-              <a:t>•  Synthesis branch failures degrade gracefully; all-empty raises ValueError</a:t>
-            </a:r>
-          </a:p>
-          <a:p>
-            <a:pPr>
-              <a:lnSpc>
-                <a:spcPct val="125000"/>
-              </a:lnSpc>
-            </a:pPr>
-            <a:r>
-              <a:rPr sz="1800">
-                <a:solidFill>
-                  <a:srgbClr val="222222"/>
-                </a:solidFill>
-                <a:latin typeface="Helvetica"/>
-              </a:rPr>
-              <a:t>•  Globus Search is read-only at the ingest boundary — harvester is offline</a:t>
-            </a:r>
-          </a:p>
-          <a:p>
-            <a:pPr>
-              <a:lnSpc>
-                <a:spcPct val="125000"/>
-              </a:lnSpc>
-            </a:pPr>
-            <a:r>
-              <a:rPr sz="1800">
-                <a:solidFill>
-                  <a:srgbClr val="222222"/>
-                </a:solidFill>
-                <a:latin typeface="Helvetica"/>
-              </a:rPr>
-              <a:t>•  extra='forbid' is mandatory on every step config (silent typo defense)</a:t>
-            </a:r>
-          </a:p>
-        </p:txBody>
-      </p:sp>
-      <p:sp>
-        <p:nvSpPr>
-          <p:cNvPr id="4" name="TextBox 3"/>
+            <a:r>
+              <a:rPr sz="1200" b="0">
+                <a:solidFill>
+                  <a:srgbClr val="666666"/>
+                </a:solidFill>
+                <a:latin typeface="Helvetica"/>
+              </a:rPr>
+              <a:t>A reading of 0.95 means the test enforces ≥95% — the actual run is at-or-above. Source: tests/integration/test_synonym_accuracy.py.</a:t>
+            </a:r>
+          </a:p>
+        </p:txBody>
+      </p:sp>
+      <p:sp>
+        <p:nvSpPr>
+          <p:cNvPr id="5" name="TextBox 4"/>
           <p:cNvSpPr txBox="1"/>
           <p:nvPr/>
         </p:nvSpPr>
@@ -4308,7 +4313,7 @@
                 </a:solidFill>
                 <a:latin typeface="Helvetica"/>
               </a:rPr>
-              <a:t>16 / 18</a:t>
+              <a:t>16 / 21</a:t>
             </a:r>
           </a:p>
         </p:txBody>
@@ -4322,6 +4327,882 @@
 </file>
 
 <file path=ppt/slides/slide17.xml><?xml version="1.0" encoding="utf-8"?>
+<p:sld xmlns:a="http://schemas.openxmlformats.org/drawingml/2006/main" xmlns:p="http://schemas.openxmlformats.org/presentationml/2006/main" xmlns:r="http://schemas.openxmlformats.org/officeDocument/2006/relationships">
+  <p:cSld>
+    <p:spTree>
+      <p:nvGrpSpPr>
+        <p:cNvPr id="1" name=""/>
+        <p:cNvGrpSpPr/>
+        <p:nvPr/>
+      </p:nvGrpSpPr>
+      <p:grpSpPr/>
+      <p:sp>
+        <p:nvSpPr>
+          <p:cNvPr id="2" name="Rectangle 1"/>
+          <p:cNvSpPr/>
+          <p:nvPr/>
+        </p:nvSpPr>
+        <p:spPr>
+          <a:xfrm>
+            <a:off x="0" y="0"/>
+            <a:ext cx="12191695" cy="777240"/>
+          </a:xfrm>
+          <a:prstGeom prst="rect">
+            <a:avLst/>
+          </a:prstGeom>
+          <a:solidFill>
+            <a:srgbClr val="2F4F6F"/>
+          </a:solidFill>
+          <a:ln>
+            <a:noFill/>
+          </a:ln>
+        </p:spPr>
+        <p:style>
+          <a:lnRef idx="1">
+            <a:schemeClr val="accent1"/>
+          </a:lnRef>
+          <a:fillRef idx="3">
+            <a:schemeClr val="accent1"/>
+          </a:fillRef>
+          <a:effectRef idx="2">
+            <a:schemeClr val="accent1"/>
+          </a:effectRef>
+          <a:fontRef idx="minor">
+            <a:schemeClr val="lt1"/>
+          </a:fontRef>
+        </p:style>
+        <p:txBody>
+          <a:bodyPr rtlCol="0" anchor="ctr" lIns="365760" tIns="164592"/>
+          <a:lstStyle/>
+          <a:p>
+            <a:pPr algn="ctr"/>
+            <a:r>
+              <a:rPr sz="2400" b="1">
+                <a:solidFill>
+                  <a:srgbClr val="FFFFFF"/>
+                </a:solidFill>
+                <a:latin typeface="Helvetica"/>
+              </a:rPr>
+              <a:t>Harmonization Statistics</a:t>
+            </a:r>
+          </a:p>
+          <a:p>
+            <a:r>
+              <a:rPr sz="1300">
+                <a:solidFill>
+                  <a:srgbClr val="CCD8E5"/>
+                </a:solidFill>
+                <a:latin typeface="Helvetica"/>
+              </a:rPr>
+              <a:t>Source corpus rows · resolution-status confidence · 13,238 total rows verified 2026-05-05</a:t>
+            </a:r>
+          </a:p>
+        </p:txBody>
+      </p:sp>
+      <p:pic>
+        <p:nvPicPr>
+          <p:cNvPr id="3" name="Picture 2" descr="13_harmonization_stats.png"/>
+          <p:cNvPicPr>
+            <a:picLocks noChangeAspect="1"/>
+          </p:cNvPicPr>
+          <p:nvPr/>
+        </p:nvPicPr>
+        <p:blipFill>
+          <a:blip r:embed="rId2"/>
+          <a:stretch>
+            <a:fillRect/>
+          </a:stretch>
+        </p:blipFill>
+        <p:spPr>
+          <a:xfrm>
+            <a:off x="365760" y="914400"/>
+            <a:ext cx="11521440" cy="4535572"/>
+          </a:xfrm>
+          <a:prstGeom prst="rect">
+            <a:avLst/>
+          </a:prstGeom>
+        </p:spPr>
+      </p:pic>
+      <p:sp>
+        <p:nvSpPr>
+          <p:cNvPr id="4" name="TextBox 3"/>
+          <p:cNvSpPr txBox="1"/>
+          <p:nvPr/>
+        </p:nvSpPr>
+        <p:spPr>
+          <a:xfrm>
+            <a:off x="640080" y="5943600"/>
+            <a:ext cx="10972800" cy="548640"/>
+          </a:xfrm>
+          <a:prstGeom prst="rect">
+            <a:avLst/>
+          </a:prstGeom>
+          <a:noFill/>
+        </p:spPr>
+        <p:txBody>
+          <a:bodyPr wrap="square">
+            <a:spAutoFit/>
+          </a:bodyPr>
+          <a:lstStyle/>
+          <a:p>
+            <a:r>
+              <a:rPr sz="1200" b="0">
+                <a:solidFill>
+                  <a:srgbClr val="666666"/>
+                </a:solidFill>
+                <a:latin typeface="Helvetica"/>
+              </a:rPr>
+              <a:t>Status taxonomy from synonym_dictionary/enums.py — every resolution result carries (status, confidence) to the caller, so downstream code can filter by quality.</a:t>
+            </a:r>
+          </a:p>
+        </p:txBody>
+      </p:sp>
+      <p:sp>
+        <p:nvSpPr>
+          <p:cNvPr id="5" name="TextBox 4"/>
+          <p:cNvSpPr txBox="1"/>
+          <p:nvPr/>
+        </p:nvSpPr>
+        <p:spPr>
+          <a:xfrm>
+            <a:off x="10515600" y="6446520"/>
+            <a:ext cx="1554480" cy="365760"/>
+          </a:xfrm>
+          <a:prstGeom prst="rect">
+            <a:avLst/>
+          </a:prstGeom>
+          <a:noFill/>
+        </p:spPr>
+        <p:txBody>
+          <a:bodyPr wrap="none">
+            <a:spAutoFit/>
+          </a:bodyPr>
+          <a:lstStyle/>
+          <a:p>
+            <a:r>
+              <a:rPr sz="1000">
+                <a:solidFill>
+                  <a:srgbClr val="666666"/>
+                </a:solidFill>
+                <a:latin typeface="Helvetica"/>
+              </a:rPr>
+              <a:t>17 / 21</a:t>
+            </a:r>
+          </a:p>
+        </p:txBody>
+      </p:sp>
+    </p:spTree>
+  </p:cSld>
+  <p:clrMapOvr>
+    <a:masterClrMapping/>
+  </p:clrMapOvr>
+</p:sld>
+</file>
+
+<file path=ppt/slides/slide18.xml><?xml version="1.0" encoding="utf-8"?>
+<p:sld xmlns:a="http://schemas.openxmlformats.org/drawingml/2006/main" xmlns:p="http://schemas.openxmlformats.org/presentationml/2006/main" xmlns:r="http://schemas.openxmlformats.org/officeDocument/2006/relationships">
+  <p:cSld>
+    <p:spTree>
+      <p:nvGrpSpPr>
+        <p:cNvPr id="1" name=""/>
+        <p:cNvGrpSpPr/>
+        <p:nvPr/>
+      </p:nvGrpSpPr>
+      <p:grpSpPr/>
+      <p:sp>
+        <p:nvSpPr>
+          <p:cNvPr id="2" name="Rectangle 1"/>
+          <p:cNvSpPr/>
+          <p:nvPr/>
+        </p:nvSpPr>
+        <p:spPr>
+          <a:xfrm>
+            <a:off x="0" y="0"/>
+            <a:ext cx="12191695" cy="777240"/>
+          </a:xfrm>
+          <a:prstGeom prst="rect">
+            <a:avLst/>
+          </a:prstGeom>
+          <a:solidFill>
+            <a:srgbClr val="2F4F6F"/>
+          </a:solidFill>
+          <a:ln>
+            <a:noFill/>
+          </a:ln>
+        </p:spPr>
+        <p:style>
+          <a:lnRef idx="1">
+            <a:schemeClr val="accent1"/>
+          </a:lnRef>
+          <a:fillRef idx="3">
+            <a:schemeClr val="accent1"/>
+          </a:fillRef>
+          <a:effectRef idx="2">
+            <a:schemeClr val="accent1"/>
+          </a:effectRef>
+          <a:fontRef idx="minor">
+            <a:schemeClr val="lt1"/>
+          </a:fontRef>
+        </p:style>
+        <p:txBody>
+          <a:bodyPr rtlCol="0" anchor="ctr" lIns="365760" tIns="164592"/>
+          <a:lstStyle/>
+          <a:p>
+            <a:pPr algn="ctr"/>
+            <a:r>
+              <a:rPr sz="2400" b="1">
+                <a:solidFill>
+                  <a:srgbClr val="FFFFFF"/>
+                </a:solidFill>
+                <a:latin typeface="Helvetica"/>
+              </a:rPr>
+              <a:t>Session Outcome</a:t>
+            </a:r>
+          </a:p>
+          <a:p>
+            <a:r>
+              <a:rPr sz="1300">
+                <a:solidFill>
+                  <a:srgbClr val="CCD8E5"/>
+                </a:solidFill>
+                <a:latin typeface="Helvetica"/>
+              </a:rPr>
+              <a:t>12 bugs / drifts uncovered, all fixed and pinned by tests</a:t>
+            </a:r>
+          </a:p>
+        </p:txBody>
+      </p:sp>
+      <p:pic>
+        <p:nvPicPr>
+          <p:cNvPr id="3" name="Picture 2" descr="09_session_bug_count.png"/>
+          <p:cNvPicPr>
+            <a:picLocks noChangeAspect="1"/>
+          </p:cNvPicPr>
+          <p:nvPr/>
+        </p:nvPicPr>
+        <p:blipFill>
+          <a:blip r:embed="rId2"/>
+          <a:stretch>
+            <a:fillRect/>
+          </a:stretch>
+        </p:blipFill>
+        <p:spPr>
+          <a:xfrm>
+            <a:off x="640080" y="914400"/>
+            <a:ext cx="10881360" cy="6050437"/>
+          </a:xfrm>
+          <a:prstGeom prst="rect">
+            <a:avLst/>
+          </a:prstGeom>
+        </p:spPr>
+      </p:pic>
+      <p:sp>
+        <p:nvSpPr>
+          <p:cNvPr id="4" name="TextBox 3"/>
+          <p:cNvSpPr txBox="1"/>
+          <p:nvPr/>
+        </p:nvSpPr>
+        <p:spPr>
+          <a:xfrm>
+            <a:off x="10515600" y="6446520"/>
+            <a:ext cx="1554480" cy="365760"/>
+          </a:xfrm>
+          <a:prstGeom prst="rect">
+            <a:avLst/>
+          </a:prstGeom>
+          <a:noFill/>
+        </p:spPr>
+        <p:txBody>
+          <a:bodyPr wrap="none">
+            <a:spAutoFit/>
+          </a:bodyPr>
+          <a:lstStyle/>
+          <a:p>
+            <a:r>
+              <a:rPr sz="1000">
+                <a:solidFill>
+                  <a:srgbClr val="666666"/>
+                </a:solidFill>
+                <a:latin typeface="Helvetica"/>
+              </a:rPr>
+              <a:t>18 / 21</a:t>
+            </a:r>
+          </a:p>
+        </p:txBody>
+      </p:sp>
+    </p:spTree>
+  </p:cSld>
+  <p:clrMapOvr>
+    <a:masterClrMapping/>
+  </p:clrMapOvr>
+</p:sld>
+</file>
+
+<file path=ppt/slides/slide19.xml><?xml version="1.0" encoding="utf-8"?>
+<p:sld xmlns:a="http://schemas.openxmlformats.org/drawingml/2006/main" xmlns:p="http://schemas.openxmlformats.org/presentationml/2006/main" xmlns:r="http://schemas.openxmlformats.org/officeDocument/2006/relationships">
+  <p:cSld>
+    <p:spTree>
+      <p:nvGrpSpPr>
+        <p:cNvPr id="1" name=""/>
+        <p:cNvGrpSpPr/>
+        <p:nvPr/>
+      </p:nvGrpSpPr>
+      <p:grpSpPr/>
+      <p:sp>
+        <p:nvSpPr>
+          <p:cNvPr id="2" name="Rectangle 1"/>
+          <p:cNvSpPr/>
+          <p:nvPr/>
+        </p:nvSpPr>
+        <p:spPr>
+          <a:xfrm>
+            <a:off x="0" y="0"/>
+            <a:ext cx="12191695" cy="777240"/>
+          </a:xfrm>
+          <a:prstGeom prst="rect">
+            <a:avLst/>
+          </a:prstGeom>
+          <a:solidFill>
+            <a:srgbClr val="2F4F6F"/>
+          </a:solidFill>
+          <a:ln>
+            <a:noFill/>
+          </a:ln>
+        </p:spPr>
+        <p:style>
+          <a:lnRef idx="1">
+            <a:schemeClr val="accent1"/>
+          </a:lnRef>
+          <a:fillRef idx="3">
+            <a:schemeClr val="accent1"/>
+          </a:fillRef>
+          <a:effectRef idx="2">
+            <a:schemeClr val="accent1"/>
+          </a:effectRef>
+          <a:fontRef idx="minor">
+            <a:schemeClr val="lt1"/>
+          </a:fontRef>
+        </p:style>
+        <p:txBody>
+          <a:bodyPr rtlCol="0" anchor="ctr" lIns="365760" tIns="164592"/>
+          <a:lstStyle/>
+          <a:p>
+            <a:pPr algn="ctr"/>
+            <a:r>
+              <a:rPr sz="2400" b="1">
+                <a:solidFill>
+                  <a:srgbClr val="FFFFFF"/>
+                </a:solidFill>
+                <a:latin typeface="Helvetica"/>
+              </a:rPr>
+              <a:t>Things That Will Surprise You</a:t>
+            </a:r>
+          </a:p>
+          <a:p>
+            <a:r>
+              <a:rPr sz="1300">
+                <a:solidFill>
+                  <a:srgbClr val="CCD8E5"/>
+                </a:solidFill>
+                <a:latin typeface="Helvetica"/>
+              </a:rPr>
+              <a:t>Silent-failure shapes you'll hit if you don't know</a:t>
+            </a:r>
+          </a:p>
+        </p:txBody>
+      </p:sp>
+      <p:sp>
+        <p:nvSpPr>
+          <p:cNvPr id="3" name="TextBox 2"/>
+          <p:cNvSpPr txBox="1"/>
+          <p:nvPr/>
+        </p:nvSpPr>
+        <p:spPr>
+          <a:xfrm>
+            <a:off x="731520" y="1188720"/>
+            <a:ext cx="10972800" cy="5029200"/>
+          </a:xfrm>
+          <a:prstGeom prst="rect">
+            <a:avLst/>
+          </a:prstGeom>
+          <a:noFill/>
+        </p:spPr>
+        <p:txBody>
+          <a:bodyPr wrap="square">
+            <a:spAutoFit/>
+          </a:bodyPr>
+          <a:lstStyle/>
+          <a:p>
+            <a:pPr>
+              <a:lnSpc>
+                <a:spcPct val="125000"/>
+              </a:lnSpc>
+            </a:pPr>
+            <a:r>
+              <a:rPr sz="1800">
+                <a:solidFill>
+                  <a:srgbClr val="222222"/>
+                </a:solidFill>
+                <a:latin typeface="Helvetica"/>
+              </a:rPr>
+              <a:t>•  Workflow.process(input) is fire-and-forget — use wait_for_cascade to await</a:t>
+            </a:r>
+          </a:p>
+          <a:p>
+            <a:pPr>
+              <a:lnSpc>
+                <a:spcPct val="125000"/>
+              </a:lnSpc>
+            </a:pPr>
+            <a:r>
+              <a:rPr sz="1800">
+                <a:solidFill>
+                  <a:srgbClr val="222222"/>
+                </a:solidFill>
+                <a:latin typeface="Helvetica"/>
+              </a:rPr>
+              <a:t>•  DirectLink defaults to auto_transfer=False — workflow loads, cascade no-ops</a:t>
+            </a:r>
+          </a:p>
+          <a:p>
+            <a:pPr>
+              <a:lnSpc>
+                <a:spcPct val="125000"/>
+              </a:lnSpc>
+            </a:pPr>
+            <a:r>
+              <a:rPr sz="1800">
+                <a:solidFill>
+                  <a:srgbClr val="222222"/>
+                </a:solidFill>
+                <a:latin typeface="Helvetica"/>
+              </a:rPr>
+              <a:t>•  Workflows need workflow-level input_data_units AND step-level data_units</a:t>
+            </a:r>
+          </a:p>
+          <a:p>
+            <a:pPr>
+              <a:lnSpc>
+                <a:spcPct val="125000"/>
+              </a:lnSpc>
+            </a:pPr>
+            <a:r>
+              <a:rPr sz="1800">
+                <a:solidFill>
+                  <a:srgbClr val="222222"/>
+                </a:solidFill>
+                <a:latin typeface="Helvetica"/>
+              </a:rPr>
+              <a:t>•  Trigger inputs are wrapped {unit_name: payload}; direct callers pass raw</a:t>
+            </a:r>
+          </a:p>
+          <a:p>
+            <a:pPr>
+              <a:lnSpc>
+                <a:spcPct val="125000"/>
+              </a:lnSpc>
+            </a:pPr>
+            <a:r>
+              <a:rPr sz="1800">
+                <a:solidFill>
+                  <a:srgbClr val="222222"/>
+                </a:solidFill>
+                <a:latin typeface="Helvetica"/>
+              </a:rPr>
+              <a:t>•  FAISS / sentence_transformers import order is load-bearing on macOS ARM</a:t>
+            </a:r>
+          </a:p>
+          <a:p>
+            <a:pPr>
+              <a:lnSpc>
+                <a:spcPct val="125000"/>
+              </a:lnSpc>
+            </a:pPr>
+            <a:r>
+              <a:rPr sz="1800">
+                <a:solidFill>
+                  <a:srgbClr val="222222"/>
+                </a:solidFill>
+                <a:latin typeface="Helvetica"/>
+              </a:rPr>
+              <a:t>•  Synthesis branch failures degrade gracefully; all-empty raises ValueError</a:t>
+            </a:r>
+          </a:p>
+          <a:p>
+            <a:pPr>
+              <a:lnSpc>
+                <a:spcPct val="125000"/>
+              </a:lnSpc>
+            </a:pPr>
+            <a:r>
+              <a:rPr sz="1800">
+                <a:solidFill>
+                  <a:srgbClr val="222222"/>
+                </a:solidFill>
+                <a:latin typeface="Helvetica"/>
+              </a:rPr>
+              <a:t>•  Globus Search is read-only at the ingest boundary — harvester is offline</a:t>
+            </a:r>
+          </a:p>
+          <a:p>
+            <a:pPr>
+              <a:lnSpc>
+                <a:spcPct val="125000"/>
+              </a:lnSpc>
+            </a:pPr>
+            <a:r>
+              <a:rPr sz="1800">
+                <a:solidFill>
+                  <a:srgbClr val="222222"/>
+                </a:solidFill>
+                <a:latin typeface="Helvetica"/>
+              </a:rPr>
+              <a:t>•  extra='forbid' is mandatory on every step config (silent typo defense)</a:t>
+            </a:r>
+          </a:p>
+        </p:txBody>
+      </p:sp>
+      <p:sp>
+        <p:nvSpPr>
+          <p:cNvPr id="4" name="TextBox 3"/>
+          <p:cNvSpPr txBox="1"/>
+          <p:nvPr/>
+        </p:nvSpPr>
+        <p:spPr>
+          <a:xfrm>
+            <a:off x="10515600" y="6446520"/>
+            <a:ext cx="1554480" cy="365760"/>
+          </a:xfrm>
+          <a:prstGeom prst="rect">
+            <a:avLst/>
+          </a:prstGeom>
+          <a:noFill/>
+        </p:spPr>
+        <p:txBody>
+          <a:bodyPr wrap="none">
+            <a:spAutoFit/>
+          </a:bodyPr>
+          <a:lstStyle/>
+          <a:p>
+            <a:r>
+              <a:rPr sz="1000">
+                <a:solidFill>
+                  <a:srgbClr val="666666"/>
+                </a:solidFill>
+                <a:latin typeface="Helvetica"/>
+              </a:rPr>
+              <a:t>19 / 21</a:t>
+            </a:r>
+          </a:p>
+        </p:txBody>
+      </p:sp>
+    </p:spTree>
+  </p:cSld>
+  <p:clrMapOvr>
+    <a:masterClrMapping/>
+  </p:clrMapOvr>
+</p:sld>
+</file>
+
+<file path=ppt/slides/slide2.xml><?xml version="1.0" encoding="utf-8"?>
+<p:sld xmlns:a="http://schemas.openxmlformats.org/drawingml/2006/main" xmlns:p="http://schemas.openxmlformats.org/presentationml/2006/main" xmlns:r="http://schemas.openxmlformats.org/officeDocument/2006/relationships">
+  <p:cSld>
+    <p:spTree>
+      <p:nvGrpSpPr>
+        <p:cNvPr id="1" name=""/>
+        <p:cNvGrpSpPr/>
+        <p:nvPr/>
+      </p:nvGrpSpPr>
+      <p:grpSpPr/>
+      <p:sp>
+        <p:nvSpPr>
+          <p:cNvPr id="2" name="Rectangle 1"/>
+          <p:cNvSpPr/>
+          <p:nvPr/>
+        </p:nvSpPr>
+        <p:spPr>
+          <a:xfrm>
+            <a:off x="0" y="0"/>
+            <a:ext cx="12191695" cy="777240"/>
+          </a:xfrm>
+          <a:prstGeom prst="rect">
+            <a:avLst/>
+          </a:prstGeom>
+          <a:solidFill>
+            <a:srgbClr val="2F4F6F"/>
+          </a:solidFill>
+          <a:ln>
+            <a:noFill/>
+          </a:ln>
+        </p:spPr>
+        <p:style>
+          <a:lnRef idx="1">
+            <a:schemeClr val="accent1"/>
+          </a:lnRef>
+          <a:fillRef idx="3">
+            <a:schemeClr val="accent1"/>
+          </a:fillRef>
+          <a:effectRef idx="2">
+            <a:schemeClr val="accent1"/>
+          </a:effectRef>
+          <a:fontRef idx="minor">
+            <a:schemeClr val="lt1"/>
+          </a:fontRef>
+        </p:style>
+        <p:txBody>
+          <a:bodyPr rtlCol="0" anchor="ctr" lIns="365760" tIns="164592"/>
+          <a:lstStyle/>
+          <a:p>
+            <a:pPr algn="ctr"/>
+            <a:r>
+              <a:rPr sz="2400" b="1">
+                <a:solidFill>
+                  <a:srgbClr val="FFFFFF"/>
+                </a:solidFill>
+                <a:latin typeface="Helvetica"/>
+              </a:rPr>
+              <a:t>Agenda</a:t>
+            </a:r>
+          </a:p>
+          <a:p>
+            <a:r>
+              <a:rPr sz="1300">
+                <a:solidFill>
+                  <a:srgbClr val="CCD8E5"/>
+                </a:solidFill>
+                <a:latin typeface="Helvetica"/>
+              </a:rPr>
+              <a:t>What this deck covers</a:t>
+            </a:r>
+          </a:p>
+        </p:txBody>
+      </p:sp>
+      <p:sp>
+        <p:nvSpPr>
+          <p:cNvPr id="3" name="TextBox 2"/>
+          <p:cNvSpPr txBox="1"/>
+          <p:nvPr/>
+        </p:nvSpPr>
+        <p:spPr>
+          <a:xfrm>
+            <a:off x="731520" y="1188720"/>
+            <a:ext cx="10972800" cy="5029200"/>
+          </a:xfrm>
+          <a:prstGeom prst="rect">
+            <a:avLst/>
+          </a:prstGeom>
+          <a:noFill/>
+        </p:spPr>
+        <p:txBody>
+          <a:bodyPr wrap="square">
+            <a:spAutoFit/>
+          </a:bodyPr>
+          <a:lstStyle/>
+          <a:p>
+            <a:pPr>
+              <a:lnSpc>
+                <a:spcPct val="115000"/>
+              </a:lnSpc>
+            </a:pPr>
+            <a:r>
+              <a:rPr sz="2000">
+                <a:solidFill>
+                  <a:srgbClr val="222222"/>
+                </a:solidFill>
+                <a:latin typeface="Helvetica"/>
+              </a:rPr>
+              <a:t>•  Two lifecycles — backend (offline, periodic) vs. user-facing (online, per-query)</a:t>
+            </a:r>
+          </a:p>
+          <a:p>
+            <a:pPr>
+              <a:lnSpc>
+                <a:spcPct val="115000"/>
+              </a:lnSpc>
+            </a:pPr>
+            <a:r>
+              <a:rPr sz="2000">
+                <a:solidFill>
+                  <a:srgbClr val="222222"/>
+                </a:solidFill>
+                <a:latin typeface="Helvetica"/>
+              </a:rPr>
+              <a:t>•  Backend harmonization pipeline — harvester + dictionary builder</a:t>
+            </a:r>
+          </a:p>
+          <a:p>
+            <a:pPr>
+              <a:lnSpc>
+                <a:spcPct val="115000"/>
+              </a:lnSpc>
+            </a:pPr>
+            <a:r>
+              <a:rPr sz="2000">
+                <a:solidFill>
+                  <a:srgbClr val="222222"/>
+                </a:solidFill>
+                <a:latin typeface="Helvetica"/>
+              </a:rPr>
+              <a:t>•  User-facing query workflow — MCP entry → synthesis → markdown</a:t>
+            </a:r>
+          </a:p>
+          <a:p>
+            <a:pPr>
+              <a:lnSpc>
+                <a:spcPct val="115000"/>
+              </a:lnSpc>
+            </a:pPr>
+            <a:r>
+              <a:rPr sz="2000">
+                <a:solidFill>
+                  <a:srgbClr val="222222"/>
+                </a:solidFill>
+                <a:latin typeface="Helvetica"/>
+              </a:rPr>
+              <a:t>•  Three-tier runtime topology (Tiers 1, 2, 4)</a:t>
+            </a:r>
+          </a:p>
+          <a:p>
+            <a:pPr>
+              <a:lnSpc>
+                <a:spcPct val="115000"/>
+              </a:lnSpc>
+            </a:pPr>
+            <a:r>
+              <a:rPr sz="2000">
+                <a:solidFill>
+                  <a:srgbClr val="222222"/>
+                </a:solidFill>
+                <a:latin typeface="Helvetica"/>
+              </a:rPr>
+              <a:t>•  Synthesis pipeline detail — 5 retrieval branches + LLM</a:t>
+            </a:r>
+          </a:p>
+          <a:p>
+            <a:pPr>
+              <a:lnSpc>
+                <a:spcPct val="115000"/>
+              </a:lnSpc>
+            </a:pPr>
+            <a:r>
+              <a:rPr sz="2000">
+                <a:solidFill>
+                  <a:srgbClr val="222222"/>
+                </a:solidFill>
+                <a:latin typeface="Helvetica"/>
+              </a:rPr>
+              <a:t>•  Trigger-cascade primitive (added 2026-05-05 to nanobrain)</a:t>
+            </a:r>
+          </a:p>
+          <a:p>
+            <a:pPr>
+              <a:lnSpc>
+                <a:spcPct val="115000"/>
+              </a:lnSpc>
+            </a:pPr>
+            <a:r>
+              <a:rPr sz="2000">
+                <a:solidFill>
+                  <a:srgbClr val="222222"/>
+                </a:solidFill>
+                <a:latin typeface="Helvetica"/>
+              </a:rPr>
+              <a:t>•  Mapping &amp; resolution strategy — fast / ancestor / slow / miss</a:t>
+            </a:r>
+          </a:p>
+          <a:p>
+            <a:pPr>
+              <a:lnSpc>
+                <a:spcPct val="115000"/>
+              </a:lnSpc>
+            </a:pPr>
+            <a:r>
+              <a:rPr sz="2000">
+                <a:solidFill>
+                  <a:srgbClr val="222222"/>
+                </a:solidFill>
+                <a:latin typeface="Helvetica"/>
+              </a:rPr>
+              <a:t>•  Ontologies, MCP tool surface, test surface</a:t>
+            </a:r>
+          </a:p>
+          <a:p>
+            <a:pPr>
+              <a:lnSpc>
+                <a:spcPct val="115000"/>
+              </a:lnSpc>
+            </a:pPr>
+            <a:r>
+              <a:rPr sz="2000">
+                <a:solidFill>
+                  <a:srgbClr val="222222"/>
+                </a:solidFill>
+                <a:latin typeface="Helvetica"/>
+              </a:rPr>
+              <a:t>•  Data quality — CI-enforced accuracy floors &amp; harmonization statistics</a:t>
+            </a:r>
+          </a:p>
+          <a:p>
+            <a:pPr>
+              <a:lnSpc>
+                <a:spcPct val="115000"/>
+              </a:lnSpc>
+            </a:pPr>
+            <a:r>
+              <a:rPr sz="2000">
+                <a:solidFill>
+                  <a:srgbClr val="222222"/>
+                </a:solidFill>
+                <a:latin typeface="Helvetica"/>
+              </a:rPr>
+              <a:t>•  Things that will surprise you (silent-failure shapes)</a:t>
+            </a:r>
+          </a:p>
+        </p:txBody>
+      </p:sp>
+      <p:sp>
+        <p:nvSpPr>
+          <p:cNvPr id="4" name="TextBox 3"/>
+          <p:cNvSpPr txBox="1"/>
+          <p:nvPr/>
+        </p:nvSpPr>
+        <p:spPr>
+          <a:xfrm>
+            <a:off x="10515600" y="6446520"/>
+            <a:ext cx="1554480" cy="365760"/>
+          </a:xfrm>
+          <a:prstGeom prst="rect">
+            <a:avLst/>
+          </a:prstGeom>
+          <a:noFill/>
+        </p:spPr>
+        <p:txBody>
+          <a:bodyPr wrap="none">
+            <a:spAutoFit/>
+          </a:bodyPr>
+          <a:lstStyle/>
+          <a:p>
+            <a:r>
+              <a:rPr sz="1000">
+                <a:solidFill>
+                  <a:srgbClr val="666666"/>
+                </a:solidFill>
+                <a:latin typeface="Helvetica"/>
+              </a:rPr>
+              <a:t>2 / 21</a:t>
+            </a:r>
+          </a:p>
+        </p:txBody>
+      </p:sp>
+    </p:spTree>
+  </p:cSld>
+  <p:clrMapOvr>
+    <a:masterClrMapping/>
+  </p:clrMapOvr>
+</p:sld>
+</file>
+
+<file path=ppt/slides/slide20.xml><?xml version="1.0" encoding="utf-8"?>
 <p:sld xmlns:a="http://schemas.openxmlformats.org/drawingml/2006/main" xmlns:p="http://schemas.openxmlformats.org/presentationml/2006/main" xmlns:r="http://schemas.openxmlformats.org/officeDocument/2006/relationships">
   <p:cSld>
     <p:spTree>
@@ -4926,7 +5807,7 @@
                 </a:solidFill>
                 <a:latin typeface="Helvetica"/>
               </a:rPr>
-              <a:t>17 / 18</a:t>
+              <a:t>20 / 21</a:t>
             </a:r>
           </a:p>
         </p:txBody>
@@ -4939,7 +5820,7 @@
 </p:sld>
 </file>
 
-<file path=ppt/slides/slide18.xml><?xml version="1.0" encoding="utf-8"?>
+<file path=ppt/slides/slide21.xml><?xml version="1.0" encoding="utf-8"?>
 <p:sld xmlns:a="http://schemas.openxmlformats.org/drawingml/2006/main" xmlns:p="http://schemas.openxmlformats.org/presentationml/2006/main" xmlns:r="http://schemas.openxmlformats.org/officeDocument/2006/relationships">
   <p:cSld>
     <p:spTree>
@@ -5178,289 +6059,7 @@
                 </a:solidFill>
                 <a:latin typeface="Helvetica"/>
               </a:rPr>
-              <a:t>18 / 18</a:t>
-            </a:r>
-          </a:p>
-        </p:txBody>
-      </p:sp>
-    </p:spTree>
-  </p:cSld>
-  <p:clrMapOvr>
-    <a:masterClrMapping/>
-  </p:clrMapOvr>
-</p:sld>
-</file>
-
-<file path=ppt/slides/slide2.xml><?xml version="1.0" encoding="utf-8"?>
-<p:sld xmlns:a="http://schemas.openxmlformats.org/drawingml/2006/main" xmlns:p="http://schemas.openxmlformats.org/presentationml/2006/main" xmlns:r="http://schemas.openxmlformats.org/officeDocument/2006/relationships">
-  <p:cSld>
-    <p:spTree>
-      <p:nvGrpSpPr>
-        <p:cNvPr id="1" name=""/>
-        <p:cNvGrpSpPr/>
-        <p:nvPr/>
-      </p:nvGrpSpPr>
-      <p:grpSpPr/>
-      <p:sp>
-        <p:nvSpPr>
-          <p:cNvPr id="2" name="Rectangle 1"/>
-          <p:cNvSpPr/>
-          <p:nvPr/>
-        </p:nvSpPr>
-        <p:spPr>
-          <a:xfrm>
-            <a:off x="0" y="0"/>
-            <a:ext cx="12191695" cy="777240"/>
-          </a:xfrm>
-          <a:prstGeom prst="rect">
-            <a:avLst/>
-          </a:prstGeom>
-          <a:solidFill>
-            <a:srgbClr val="2F4F6F"/>
-          </a:solidFill>
-          <a:ln>
-            <a:noFill/>
-          </a:ln>
-        </p:spPr>
-        <p:style>
-          <a:lnRef idx="1">
-            <a:schemeClr val="accent1"/>
-          </a:lnRef>
-          <a:fillRef idx="3">
-            <a:schemeClr val="accent1"/>
-          </a:fillRef>
-          <a:effectRef idx="2">
-            <a:schemeClr val="accent1"/>
-          </a:effectRef>
-          <a:fontRef idx="minor">
-            <a:schemeClr val="lt1"/>
-          </a:fontRef>
-        </p:style>
-        <p:txBody>
-          <a:bodyPr rtlCol="0" anchor="ctr" lIns="365760" tIns="164592"/>
-          <a:lstStyle/>
-          <a:p>
-            <a:pPr algn="ctr"/>
-            <a:r>
-              <a:rPr sz="2400" b="1">
-                <a:solidFill>
-                  <a:srgbClr val="FFFFFF"/>
-                </a:solidFill>
-                <a:latin typeface="Helvetica"/>
-              </a:rPr>
-              <a:t>Agenda</a:t>
-            </a:r>
-          </a:p>
-          <a:p>
-            <a:r>
-              <a:rPr sz="1300">
-                <a:solidFill>
-                  <a:srgbClr val="CCD8E5"/>
-                </a:solidFill>
-                <a:latin typeface="Helvetica"/>
-              </a:rPr>
-              <a:t>What this deck covers</a:t>
-            </a:r>
-          </a:p>
-        </p:txBody>
-      </p:sp>
-      <p:sp>
-        <p:nvSpPr>
-          <p:cNvPr id="3" name="TextBox 2"/>
-          <p:cNvSpPr txBox="1"/>
-          <p:nvPr/>
-        </p:nvSpPr>
-        <p:spPr>
-          <a:xfrm>
-            <a:off x="731520" y="1188720"/>
-            <a:ext cx="10972800" cy="5029200"/>
-          </a:xfrm>
-          <a:prstGeom prst="rect">
-            <a:avLst/>
-          </a:prstGeom>
-          <a:noFill/>
-        </p:spPr>
-        <p:txBody>
-          <a:bodyPr wrap="square">
-            <a:spAutoFit/>
-          </a:bodyPr>
-          <a:lstStyle/>
-          <a:p>
-            <a:pPr>
-              <a:lnSpc>
-                <a:spcPct val="115000"/>
-              </a:lnSpc>
-            </a:pPr>
-            <a:r>
-              <a:rPr sz="2000">
-                <a:solidFill>
-                  <a:srgbClr val="222222"/>
-                </a:solidFill>
-                <a:latin typeface="Helvetica"/>
-              </a:rPr>
-              <a:t>•  Two lifecycles — backend (offline, periodic) vs. user-facing (online, per-query)</a:t>
-            </a:r>
-          </a:p>
-          <a:p>
-            <a:pPr>
-              <a:lnSpc>
-                <a:spcPct val="115000"/>
-              </a:lnSpc>
-            </a:pPr>
-            <a:r>
-              <a:rPr sz="2000">
-                <a:solidFill>
-                  <a:srgbClr val="222222"/>
-                </a:solidFill>
-                <a:latin typeface="Helvetica"/>
-              </a:rPr>
-              <a:t>•  Backend harmonization pipeline — harvester + dictionary builder</a:t>
-            </a:r>
-          </a:p>
-          <a:p>
-            <a:pPr>
-              <a:lnSpc>
-                <a:spcPct val="115000"/>
-              </a:lnSpc>
-            </a:pPr>
-            <a:r>
-              <a:rPr sz="2000">
-                <a:solidFill>
-                  <a:srgbClr val="222222"/>
-                </a:solidFill>
-                <a:latin typeface="Helvetica"/>
-              </a:rPr>
-              <a:t>•  User-facing query workflow — MCP entry → synthesis → markdown</a:t>
-            </a:r>
-          </a:p>
-          <a:p>
-            <a:pPr>
-              <a:lnSpc>
-                <a:spcPct val="115000"/>
-              </a:lnSpc>
-            </a:pPr>
-            <a:r>
-              <a:rPr sz="2000">
-                <a:solidFill>
-                  <a:srgbClr val="222222"/>
-                </a:solidFill>
-                <a:latin typeface="Helvetica"/>
-              </a:rPr>
-              <a:t>•  Three-tier runtime topology (Tiers 1, 2, 4)</a:t>
-            </a:r>
-          </a:p>
-          <a:p>
-            <a:pPr>
-              <a:lnSpc>
-                <a:spcPct val="115000"/>
-              </a:lnSpc>
-            </a:pPr>
-            <a:r>
-              <a:rPr sz="2000">
-                <a:solidFill>
-                  <a:srgbClr val="222222"/>
-                </a:solidFill>
-                <a:latin typeface="Helvetica"/>
-              </a:rPr>
-              <a:t>•  Synthesis pipeline detail — 5 retrieval branches + LLM</a:t>
-            </a:r>
-          </a:p>
-          <a:p>
-            <a:pPr>
-              <a:lnSpc>
-                <a:spcPct val="115000"/>
-              </a:lnSpc>
-            </a:pPr>
-            <a:r>
-              <a:rPr sz="2000">
-                <a:solidFill>
-                  <a:srgbClr val="222222"/>
-                </a:solidFill>
-                <a:latin typeface="Helvetica"/>
-              </a:rPr>
-              <a:t>•  Trigger-cascade primitive (added 2026-05-05 to nanobrain)</a:t>
-            </a:r>
-          </a:p>
-          <a:p>
-            <a:pPr>
-              <a:lnSpc>
-                <a:spcPct val="115000"/>
-              </a:lnSpc>
-            </a:pPr>
-            <a:r>
-              <a:rPr sz="2000">
-                <a:solidFill>
-                  <a:srgbClr val="222222"/>
-                </a:solidFill>
-                <a:latin typeface="Helvetica"/>
-              </a:rPr>
-              <a:t>•  Mapping &amp; resolution strategy — fast / ancestor / slow / miss</a:t>
-            </a:r>
-          </a:p>
-          <a:p>
-            <a:pPr>
-              <a:lnSpc>
-                <a:spcPct val="115000"/>
-              </a:lnSpc>
-            </a:pPr>
-            <a:r>
-              <a:rPr sz="2000">
-                <a:solidFill>
-                  <a:srgbClr val="222222"/>
-                </a:solidFill>
-                <a:latin typeface="Helvetica"/>
-              </a:rPr>
-              <a:t>•  Ontologies, MCP tool surface, test surface</a:t>
-            </a:r>
-          </a:p>
-          <a:p>
-            <a:pPr>
-              <a:lnSpc>
-                <a:spcPct val="115000"/>
-              </a:lnSpc>
-            </a:pPr>
-            <a:r>
-              <a:rPr sz="2000">
-                <a:solidFill>
-                  <a:srgbClr val="222222"/>
-                </a:solidFill>
-                <a:latin typeface="Helvetica"/>
-              </a:rPr>
-              <a:t>•  Things that will surprise you (silent-failure shapes)</a:t>
-            </a:r>
-          </a:p>
-        </p:txBody>
-      </p:sp>
-      <p:sp>
-        <p:nvSpPr>
-          <p:cNvPr id="4" name="TextBox 3"/>
-          <p:cNvSpPr txBox="1"/>
-          <p:nvPr/>
-        </p:nvSpPr>
-        <p:spPr>
-          <a:xfrm>
-            <a:off x="10515600" y="6446520"/>
-            <a:ext cx="1554480" cy="365760"/>
-          </a:xfrm>
-          <a:prstGeom prst="rect">
-            <a:avLst/>
-          </a:prstGeom>
-          <a:noFill/>
-        </p:spPr>
-        <p:txBody>
-          <a:bodyPr wrap="none">
-            <a:spAutoFit/>
-          </a:bodyPr>
-          <a:lstStyle/>
-          <a:p>
-            <a:r>
-              <a:rPr sz="1000">
-                <a:solidFill>
-                  <a:srgbClr val="666666"/>
-                </a:solidFill>
-                <a:latin typeface="Helvetica"/>
-              </a:rPr>
-              <a:t>2 / 18</a:t>
+              <a:t>21 / 21</a:t>
             </a:r>
           </a:p>
         </p:txBody>
@@ -5648,7 +6247,7 @@
                 </a:solidFill>
                 <a:latin typeface="Helvetica"/>
               </a:rPr>
-              <a:t>3 / 18</a:t>
+              <a:t>3 / 21</a:t>
             </a:r>
           </a:p>
         </p:txBody>
@@ -6071,7 +6670,7 @@
                 </a:solidFill>
                 <a:latin typeface="Helvetica"/>
               </a:rPr>
-              <a:t>4 / 18</a:t>
+              <a:t>4 / 21</a:t>
             </a:r>
           </a:p>
         </p:txBody>
@@ -6210,7 +6809,7 @@
                 </a:solidFill>
                 <a:latin typeface="Helvetica"/>
               </a:rPr>
-              <a:t>5 / 18</a:t>
+              <a:t>5 / 21</a:t>
             </a:r>
           </a:p>
         </p:txBody>
@@ -6349,7 +6948,7 @@
                 </a:solidFill>
                 <a:latin typeface="Helvetica"/>
               </a:rPr>
-              <a:t>6 / 18</a:t>
+              <a:t>6 / 21</a:t>
             </a:r>
           </a:p>
         </p:txBody>
@@ -6488,7 +7087,7 @@
                 </a:solidFill>
                 <a:latin typeface="Helvetica"/>
               </a:rPr>
-              <a:t>7 / 18</a:t>
+              <a:t>7 / 21</a:t>
             </a:r>
           </a:p>
         </p:txBody>
@@ -6627,7 +7226,7 @@
                 </a:solidFill>
                 <a:latin typeface="Helvetica"/>
               </a:rPr>
-              <a:t>8 / 18</a:t>
+              <a:t>8 / 21</a:t>
             </a:r>
           </a:p>
         </p:txBody>
@@ -6766,7 +7365,7 @@
                 </a:solidFill>
                 <a:latin typeface="Helvetica"/>
               </a:rPr>
-              <a:t>9 / 18</a:t>
+              <a:t>9 / 21</a:t>
             </a:r>
           </a:p>
         </p:txBody>
